--- a/docs/Growth_Talent_Marketplace_ALP.pptx
+++ b/docs/Growth_Talent_Marketplace_ALP.pptx
@@ -249,7 +249,7 @@
                 <c:formatCode>General</c:formatCode>
                 <c:ptCount val="3"/>
                 <c:pt idx="0">
-                  <c:v>1.05</c:v>
+                  <c:v>1.96</c:v>
                 </c:pt>
                 <c:pt idx="1">
                   <c:v>10.15</c:v>
@@ -1407,7 +1407,7 @@
           <a:p>
             <a:r>
               <a:rPr lang="en-US" dirty="0"/>
-              <a:t>Lead with the two italic rows. Volunteering that the softest input can be deleted entirely and the case still clears at 3.8 is what makes the other numbers believable.</a:t>
+              <a:t>Lead with the two italic rows. Volunteering that the softest input can be deleted entirely and the case still clears at 2.0 is what makes the other numbers believable. If challenged on the drop from the earlier 6.8: that used our planning estimate; this uses IT's costed man-hours, and the case still clears every stress case.</a:t>
             </a:r>
             <a:endParaRPr lang="en-US" dirty="0"/>
           </a:p>
@@ -5408,7 +5408,7 @@
                 <a:ea typeface="Arial" pitchFamily="34" charset="-122"/>
                 <a:cs typeface="Arial" pitchFamily="34" charset="-120"/>
               </a:rPr>
-              <a:t>Add your skills, or confirm the ones P&amp;C already imported from HR records.</a:t>
+              <a:t>Add your skills, or confirm the ones HR already imported from your record.</a:t>
             </a:r>
             <a:endParaRPr lang="en-US" sz="1400" dirty="0"/>
           </a:p>
@@ -6666,7 +6666,7 @@
                 <a:ea typeface="Arial" pitchFamily="34" charset="-122"/>
                 <a:cs typeface="Arial" pitchFamily="34" charset="-120"/>
               </a:rPr>
-              <a:t>PEOPLE &amp; CULTURE</a:t>
+              <a:t>HR</a:t>
             </a:r>
             <a:endParaRPr lang="en-US" sz="1400" dirty="0"/>
           </a:p>
@@ -7626,7 +7626,7 @@
                 <a:ea typeface="Arial" pitchFamily="34" charset="-122"/>
                 <a:cs typeface="Arial" pitchFamily="34" charset="-120"/>
               </a:rPr>
-              <a:t>An attribution funnel for P&amp;C</a:t>
+              <a:t>An attribution funnel for HR</a:t>
             </a:r>
             <a:endParaRPr lang="en-US" sz="1600" dirty="0"/>
           </a:p>
@@ -9356,7 +9356,7 @@
                 <a:ea typeface="Arial" pitchFamily="34" charset="-122"/>
                 <a:cs typeface="Arial" pitchFamily="34" charset="-120"/>
               </a:rPr>
-              <a:t>Pilot scope: 637 employees across IT, Operations and People &amp; Culture.</a:t>
+              <a:t>Pilot scope: 637 employees across IT, Operations and HR.</a:t>
             </a:r>
             <a:endParaRPr lang="en-US" sz="1600" dirty="0"/>
           </a:p>
@@ -9617,7 +9617,7 @@
                 <a:ea typeface="Arial" pitchFamily="34" charset="-122"/>
                 <a:cs typeface="Arial" pitchFamily="34" charset="-120"/>
               </a:rPr>
-              <a:t>People &amp; Culture</a:t>
+              <a:t>HR</a:t>
             </a:r>
             <a:endParaRPr lang="en-US" sz="1600" dirty="0"/>
           </a:p>
@@ -10734,7 +10734,7 @@
                 <a:ea typeface="Arial" pitchFamily="34" charset="-122"/>
                 <a:cs typeface="Arial" pitchFamily="34" charset="-120"/>
               </a:rPr>
-              <a:t>₱1.05M over three years. ₱550 per employee a year.</a:t>
+              <a:t>₱1.96M over three years, ₱1,027 per employee.</a:t>
             </a:r>
             <a:endParaRPr lang="en-US" sz="3200" dirty="0"/>
           </a:p>
@@ -10773,7 +10773,7 @@
                 <a:ea typeface="Arial" pitchFamily="34" charset="-122"/>
                 <a:cs typeface="Arial" pitchFamily="34" charset="-120"/>
               </a:rPr>
-              <a:t>Bottom-up from a completed Business Requirements Document — not a placeholder. Population 637, FX ₱58 = US$1.</a:t>
+              <a:t>IT has costed the build at ₱1,785,500 in man-hours. Population 637, FX ₱58 = US$1, three-year horizon.</a:t>
             </a:r>
             <a:endParaRPr lang="en-US" sz="1600" dirty="0"/>
           </a:p>
@@ -10846,7 +10846,7 @@
                 <a:ea typeface="Arial" pitchFamily="34" charset="-122"/>
                 <a:cs typeface="Arial" pitchFamily="34" charset="-120"/>
               </a:rPr>
-              <a:t>₱766,125</a:t>
+              <a:t>₱1,509,325</a:t>
             </a:r>
             <a:endParaRPr lang="en-US" sz="3000" dirty="0"/>
           </a:p>
@@ -10930,7 +10930,7 @@
                 <a:ea typeface="Arial" pitchFamily="34" charset="-122"/>
                 <a:cs typeface="Arial" pitchFamily="34" charset="-120"/>
               </a:rPr>
-              <a:t>build ₱711k, run ₱55k</a:t>
+              <a:t>build ₱1,454,200, run ₱55,125</a:t>
             </a:r>
             <a:endParaRPr lang="en-US" sz="1400" dirty="0"/>
           </a:p>
@@ -11003,7 +11003,7 @@
                 <a:ea typeface="Arial" pitchFamily="34" charset="-122"/>
                 <a:cs typeface="Arial" pitchFamily="34" charset="-120"/>
               </a:rPr>
-              <a:t>₱223,125</a:t>
+              <a:t>₱392,425</a:t>
             </a:r>
             <a:endParaRPr lang="en-US" sz="3000" dirty="0"/>
           </a:p>
@@ -11317,7 +11317,7 @@
                 <a:ea typeface="Arial" pitchFamily="34" charset="-122"/>
                 <a:cs typeface="Arial" pitchFamily="34" charset="-120"/>
               </a:rPr>
-              <a:t>₱1,050,375</a:t>
+              <a:t>₱1,962,875</a:t>
             </a:r>
             <a:endParaRPr lang="en-US" sz="3000" dirty="0"/>
           </a:p>
@@ -11401,7 +11401,7 @@
                 <a:ea typeface="Arial" pitchFamily="34" charset="-122"/>
                 <a:cs typeface="Arial" pitchFamily="34" charset="-120"/>
               </a:rPr>
-              <a:t>₱1,649 per employee</a:t>
+              <a:t>₱3,081 per employee</a:t>
             </a:r>
             <a:endParaRPr lang="en-US" sz="1400" dirty="0"/>
           </a:p>
@@ -11474,7 +11474,7 @@
                 <a:ea typeface="Arial" pitchFamily="34" charset="-122"/>
                 <a:cs typeface="Arial" pitchFamily="34" charset="-120"/>
               </a:rPr>
-              <a:t>Year-one build — where the money goes</a:t>
+              <a:t>Where the money goes</a:t>
             </a:r>
             <a:endParaRPr lang="en-US" sz="1700" dirty="0"/>
           </a:p>
@@ -11656,7 +11656,7 @@
                           <a:ea typeface="Arial" pitchFamily="34" charset="-122"/>
                           <a:cs typeface="Arial" pitchFamily="34" charset="-120"/>
                         </a:rPr>
-                        <a:t>Full-stack developer, 1.4 months</a:t>
+                        <a:t>Build, year one — promotion, matching, JD reader, handoff</a:t>
                       </a:r>
                       <a:endParaRPr lang="en-US" sz="1400" dirty="0">
                         <a:latin typeface="Arial" charset="0"/>
@@ -11721,7 +11721,7 @@
                           <a:ea typeface="Arial" pitchFamily="34" charset="-122"/>
                           <a:cs typeface="Arial" pitchFamily="34" charset="-120"/>
                         </a:rPr>
-                        <a:t>210,000</a:t>
+                        <a:t>1,454,200</a:t>
                       </a:r>
                       <a:endParaRPr lang="en-US" sz="1400" dirty="0">
                         <a:latin typeface="Arial" charset="0"/>
@@ -11788,7 +11788,7 @@
                           <a:ea typeface="Arial" pitchFamily="34" charset="-122"/>
                           <a:cs typeface="Arial" pitchFamily="34" charset="-120"/>
                         </a:rPr>
-                        <a:t>Designer, 1.5 months at 50%</a:t>
+                        <a:t>Build, year two — the deferred referral engine</a:t>
                       </a:r>
                       <a:endParaRPr lang="en-US" sz="1400" dirty="0">
                         <a:latin typeface="Arial" charset="0"/>
@@ -11853,7 +11853,139 @@
                           <a:ea typeface="Arial" pitchFamily="34" charset="-122"/>
                           <a:cs typeface="Arial" pitchFamily="34" charset="-120"/>
                         </a:rPr>
-                        <a:t>82,500</a:t>
+                        <a:t>331,300</a:t>
+                      </a:r>
+                      <a:endParaRPr lang="en-US" sz="1400" dirty="0">
+                        <a:latin typeface="Arial" charset="0"/>
+                        <a:ea typeface="Arial" charset="0"/>
+                        <a:cs typeface="Arial" charset="0"/>
+                      </a:endParaRPr>
+                    </a:p>
+                  </a:txBody>
+                  <a:tcPr marL="91440" marR="91440" marT="45720" marB="45720" anchor="ctr">
+                    <a:lnL w="12700" cap="flat" cmpd="sng" algn="ctr">
+                      <a:solidFill>
+                        <a:srgbClr val="F1F5F9"/>
+                      </a:solidFill>
+                      <a:prstDash val="solid"/>
+                      <a:round/>
+                      <a:headEnd type="none" w="med" len="med"/>
+                      <a:tailEnd type="none" w="med" len="med"/>
+                    </a:lnL>
+                    <a:lnR w="12700" cap="flat" cmpd="sng" algn="ctr">
+                      <a:solidFill>
+                        <a:srgbClr val="F1F5F9"/>
+                      </a:solidFill>
+                      <a:prstDash val="solid"/>
+                      <a:round/>
+                      <a:headEnd type="none" w="med" len="med"/>
+                      <a:tailEnd type="none" w="med" len="med"/>
+                    </a:lnR>
+                    <a:lnT w="12700" cap="flat" cmpd="sng" algn="ctr">
+                      <a:solidFill>
+                        <a:srgbClr val="F1F5F9"/>
+                      </a:solidFill>
+                      <a:prstDash val="solid"/>
+                      <a:round/>
+                      <a:headEnd type="none" w="med" len="med"/>
+                      <a:tailEnd type="none" w="med" len="med"/>
+                    </a:lnT>
+                    <a:lnB w="12700" cap="flat" cmpd="sng" algn="ctr">
+                      <a:solidFill>
+                        <a:srgbClr val="F1F5F9"/>
+                      </a:solidFill>
+                      <a:prstDash val="solid"/>
+                      <a:round/>
+                      <a:headEnd type="none" w="med" len="med"/>
+                      <a:tailEnd type="none" w="med" len="med"/>
+                    </a:lnB>
+                  </a:tcPr>
+                </a:tc>
+              </a:tr>
+              <a:tr h="237744">
+                <a:tc>
+                  <a:txBody>
+                    <a:bodyPr/>
+                    <a:lstStyle/>
+                    <a:p>
+                      <a:pPr indent="0" marL="0">
+                        <a:buNone/>
+                      </a:pPr>
+                      <a:r>
+                        <a:rPr lang="en-US" sz="1400" b="1" dirty="0">
+                          <a:solidFill>
+                            <a:srgbClr val="0F172A"/>
+                          </a:solidFill>
+                          <a:latin typeface="Arial" pitchFamily="34" charset="0"/>
+                          <a:ea typeface="Arial" pitchFamily="34" charset="-122"/>
+                          <a:cs typeface="Arial" pitchFamily="34" charset="-120"/>
+                        </a:rPr>
+                        <a:t>Build, costed by IT</a:t>
+                      </a:r>
+                      <a:endParaRPr lang="en-US" sz="1400" dirty="0">
+                        <a:latin typeface="Arial" charset="0"/>
+                        <a:ea typeface="Arial" charset="0"/>
+                        <a:cs typeface="Arial" charset="0"/>
+                      </a:endParaRPr>
+                    </a:p>
+                  </a:txBody>
+                  <a:tcPr marL="91440" marR="91440" marT="45720" marB="45720" anchor="ctr">
+                    <a:lnL w="12700" cap="flat" cmpd="sng" algn="ctr">
+                      <a:solidFill>
+                        <a:srgbClr val="F1F5F9"/>
+                      </a:solidFill>
+                      <a:prstDash val="solid"/>
+                      <a:round/>
+                      <a:headEnd type="none" w="med" len="med"/>
+                      <a:tailEnd type="none" w="med" len="med"/>
+                    </a:lnL>
+                    <a:lnR w="12700" cap="flat" cmpd="sng" algn="ctr">
+                      <a:solidFill>
+                        <a:srgbClr val="F1F5F9"/>
+                      </a:solidFill>
+                      <a:prstDash val="solid"/>
+                      <a:round/>
+                      <a:headEnd type="none" w="med" len="med"/>
+                      <a:tailEnd type="none" w="med" len="med"/>
+                    </a:lnR>
+                    <a:lnT w="12700" cap="flat" cmpd="sng" algn="ctr">
+                      <a:solidFill>
+                        <a:srgbClr val="F1F5F9"/>
+                      </a:solidFill>
+                      <a:prstDash val="solid"/>
+                      <a:round/>
+                      <a:headEnd type="none" w="med" len="med"/>
+                      <a:tailEnd type="none" w="med" len="med"/>
+                    </a:lnT>
+                    <a:lnB w="12700" cap="flat" cmpd="sng" algn="ctr">
+                      <a:solidFill>
+                        <a:srgbClr val="F1F5F9"/>
+                      </a:solidFill>
+                      <a:prstDash val="solid"/>
+                      <a:round/>
+                      <a:headEnd type="none" w="med" len="med"/>
+                      <a:tailEnd type="none" w="med" len="med"/>
+                    </a:lnB>
+                  </a:tcPr>
+                </a:tc>
+                <a:tc>
+                  <a:txBody>
+                    <a:bodyPr/>
+                    <a:lstStyle/>
+                    <a:p>
+                      <a:pPr algn="r" indent="0" marL="0">
+                        <a:buNone/>
+                      </a:pPr>
+                      <a:r>
+                        <a:rPr lang="en-US" sz="1400" b="1" dirty="0">
+                          <a:solidFill>
+                            <a:srgbClr val="C00000"/>
+                          </a:solidFill>
+                          <a:latin typeface="Arial" pitchFamily="34" charset="0"/>
+                          <a:ea typeface="Arial" pitchFamily="34" charset="-122"/>
+                          <a:cs typeface="Arial" pitchFamily="34" charset="-120"/>
+                        </a:rPr>
+                        <a:t>1,785,500</a:t>
                       </a:r>
                       <a:endParaRPr lang="en-US" sz="1400" dirty="0">
                         <a:latin typeface="Arial" charset="0"/>
@@ -11920,7 +12052,7 @@
                           <a:ea typeface="Arial" pitchFamily="34" charset="-122"/>
                           <a:cs typeface="Arial" pitchFamily="34" charset="-120"/>
                         </a:rPr>
-                        <a:t>Project manager / analyst, 4 months at 30%</a:t>
+                        <a:t>Run, year one</a:t>
                       </a:r>
                       <a:endParaRPr lang="en-US" sz="1400" dirty="0">
                         <a:latin typeface="Arial" charset="0"/>
@@ -11985,7 +12117,7 @@
                           <a:ea typeface="Arial" pitchFamily="34" charset="-122"/>
                           <a:cs typeface="Arial" pitchFamily="34" charset="-120"/>
                         </a:rPr>
-                        <a:t>180,000</a:t>
+                        <a:t>55,125</a:t>
                       </a:r>
                       <a:endParaRPr lang="en-US" sz="1400" dirty="0">
                         <a:latin typeface="Arial" charset="0"/>
@@ -12052,7 +12184,7 @@
                           <a:ea typeface="Arial" pitchFamily="34" charset="-122"/>
                           <a:cs typeface="Arial" pitchFamily="34" charset="-120"/>
                         </a:rPr>
-                        <a:t>Security review, DPA assessment and DPIA</a:t>
+                        <a:t>Run, years two and three</a:t>
                       </a:r>
                       <a:endParaRPr lang="en-US" sz="1400" dirty="0">
                         <a:latin typeface="Arial" charset="0"/>
@@ -12117,139 +12249,7 @@
                           <a:ea typeface="Arial" pitchFamily="34" charset="-122"/>
                           <a:cs typeface="Arial" pitchFamily="34" charset="-120"/>
                         </a:rPr>
-                        <a:t>120,000</a:t>
-                      </a:r>
-                      <a:endParaRPr lang="en-US" sz="1400" dirty="0">
-                        <a:latin typeface="Arial" charset="0"/>
-                        <a:ea typeface="Arial" charset="0"/>
-                        <a:cs typeface="Arial" charset="0"/>
-                      </a:endParaRPr>
-                    </a:p>
-                  </a:txBody>
-                  <a:tcPr marL="91440" marR="91440" marT="45720" marB="45720" anchor="ctr">
-                    <a:lnL w="12700" cap="flat" cmpd="sng" algn="ctr">
-                      <a:solidFill>
-                        <a:srgbClr val="F1F5F9"/>
-                      </a:solidFill>
-                      <a:prstDash val="solid"/>
-                      <a:round/>
-                      <a:headEnd type="none" w="med" len="med"/>
-                      <a:tailEnd type="none" w="med" len="med"/>
-                    </a:lnL>
-                    <a:lnR w="12700" cap="flat" cmpd="sng" algn="ctr">
-                      <a:solidFill>
-                        <a:srgbClr val="F1F5F9"/>
-                      </a:solidFill>
-                      <a:prstDash val="solid"/>
-                      <a:round/>
-                      <a:headEnd type="none" w="med" len="med"/>
-                      <a:tailEnd type="none" w="med" len="med"/>
-                    </a:lnR>
-                    <a:lnT w="12700" cap="flat" cmpd="sng" algn="ctr">
-                      <a:solidFill>
-                        <a:srgbClr val="F1F5F9"/>
-                      </a:solidFill>
-                      <a:prstDash val="solid"/>
-                      <a:round/>
-                      <a:headEnd type="none" w="med" len="med"/>
-                      <a:tailEnd type="none" w="med" len="med"/>
-                    </a:lnT>
-                    <a:lnB w="12700" cap="flat" cmpd="sng" algn="ctr">
-                      <a:solidFill>
-                        <a:srgbClr val="F1F5F9"/>
-                      </a:solidFill>
-                      <a:prstDash val="solid"/>
-                      <a:round/>
-                      <a:headEnd type="none" w="med" len="med"/>
-                      <a:tailEnd type="none" w="med" len="med"/>
-                    </a:lnB>
-                  </a:tcPr>
-                </a:tc>
-              </a:tr>
-              <a:tr h="237744">
-                <a:tc>
-                  <a:txBody>
-                    <a:bodyPr/>
-                    <a:lstStyle/>
-                    <a:p>
-                      <a:pPr indent="0" marL="0">
-                        <a:buNone/>
-                      </a:pPr>
-                      <a:r>
-                        <a:rPr lang="en-US" sz="1400" dirty="0">
-                          <a:solidFill>
-                            <a:srgbClr val="374151"/>
-                          </a:solidFill>
-                          <a:latin typeface="Arial" pitchFamily="34" charset="0"/>
-                          <a:ea typeface="Arial" pitchFamily="34" charset="-122"/>
-                          <a:cs typeface="Arial" pitchFamily="34" charset="-120"/>
-                        </a:rPr>
-                        <a:t>Contingency at 20%</a:t>
-                      </a:r>
-                      <a:endParaRPr lang="en-US" sz="1400" dirty="0">
-                        <a:latin typeface="Arial" charset="0"/>
-                        <a:ea typeface="Arial" charset="0"/>
-                        <a:cs typeface="Arial" charset="0"/>
-                      </a:endParaRPr>
-                    </a:p>
-                  </a:txBody>
-                  <a:tcPr marL="91440" marR="91440" marT="45720" marB="45720" anchor="ctr">
-                    <a:lnL w="12700" cap="flat" cmpd="sng" algn="ctr">
-                      <a:solidFill>
-                        <a:srgbClr val="F1F5F9"/>
-                      </a:solidFill>
-                      <a:prstDash val="solid"/>
-                      <a:round/>
-                      <a:headEnd type="none" w="med" len="med"/>
-                      <a:tailEnd type="none" w="med" len="med"/>
-                    </a:lnL>
-                    <a:lnR w="12700" cap="flat" cmpd="sng" algn="ctr">
-                      <a:solidFill>
-                        <a:srgbClr val="F1F5F9"/>
-                      </a:solidFill>
-                      <a:prstDash val="solid"/>
-                      <a:round/>
-                      <a:headEnd type="none" w="med" len="med"/>
-                      <a:tailEnd type="none" w="med" len="med"/>
-                    </a:lnR>
-                    <a:lnT w="12700" cap="flat" cmpd="sng" algn="ctr">
-                      <a:solidFill>
-                        <a:srgbClr val="F1F5F9"/>
-                      </a:solidFill>
-                      <a:prstDash val="solid"/>
-                      <a:round/>
-                      <a:headEnd type="none" w="med" len="med"/>
-                      <a:tailEnd type="none" w="med" len="med"/>
-                    </a:lnT>
-                    <a:lnB w="12700" cap="flat" cmpd="sng" algn="ctr">
-                      <a:solidFill>
-                        <a:srgbClr val="F1F5F9"/>
-                      </a:solidFill>
-                      <a:prstDash val="solid"/>
-                      <a:round/>
-                      <a:headEnd type="none" w="med" len="med"/>
-                      <a:tailEnd type="none" w="med" len="med"/>
-                    </a:lnB>
-                  </a:tcPr>
-                </a:tc>
-                <a:tc>
-                  <a:txBody>
-                    <a:bodyPr/>
-                    <a:lstStyle/>
-                    <a:p>
-                      <a:pPr algn="r" indent="0" marL="0">
-                        <a:buNone/>
-                      </a:pPr>
-                      <a:r>
-                        <a:rPr lang="en-US" sz="1400" dirty="0">
-                          <a:solidFill>
-                            <a:srgbClr val="374151"/>
-                          </a:solidFill>
-                          <a:latin typeface="Arial" pitchFamily="34" charset="0"/>
-                          <a:ea typeface="Arial" pitchFamily="34" charset="-122"/>
-                          <a:cs typeface="Arial" pitchFamily="34" charset="-120"/>
-                        </a:rPr>
-                        <a:t>118,500</a:t>
+                        <a:t>122,250</a:t>
                       </a:r>
                       <a:endParaRPr lang="en-US" sz="1400" dirty="0">
                         <a:latin typeface="Arial" charset="0"/>
@@ -12316,7 +12316,7 @@
                           <a:ea typeface="Arial" pitchFamily="34" charset="-122"/>
                           <a:cs typeface="Arial" pitchFamily="34" charset="-120"/>
                         </a:rPr>
-                        <a:t>Build, year one</a:t>
+                        <a:t>Three-year total cost of ownership</a:t>
                       </a:r>
                       <a:endParaRPr lang="en-US" sz="1400" dirty="0">
                         <a:latin typeface="Arial" charset="0"/>
@@ -12381,7 +12381,7 @@
                           <a:ea typeface="Arial" pitchFamily="34" charset="-122"/>
                           <a:cs typeface="Arial" pitchFamily="34" charset="-120"/>
                         </a:rPr>
-                        <a:t>711,000</a:t>
+                        <a:t>1,962,875</a:t>
                       </a:r>
                       <a:endParaRPr lang="en-US" sz="1400" dirty="0">
                         <a:latin typeface="Arial" charset="0"/>
@@ -12494,7 +12494,7 @@
                 <a:ea typeface="Arial" pitchFamily="34" charset="-122"/>
                 <a:cs typeface="Arial" pitchFamily="34" charset="-120"/>
               </a:rPr>
-              <a:t>Cheaper than v1, doing more</a:t>
+              <a:t>This is IT's number, not ours</a:t>
             </a:r>
             <a:endParaRPr lang="en-US" sz="1700" dirty="0"/>
           </a:p>
@@ -12536,7 +12536,7 @@
                 <a:ea typeface="Arial" pitchFamily="34" charset="-122"/>
                 <a:cs typeface="Arial" pitchFamily="34" charset="-120"/>
               </a:rPr>
-              <a:t>Five decisions took ₱491,761 out of the first estimate without touching anything that drives internal growth.</a:t>
+              <a:t>Our planning estimate was ₱873,000. IT has costed the man-hours at ₱1,785,500 — roughly double, and it is the figure used throughout.</a:t>
             </a:r>
             <a:endParaRPr lang="en-US" sz="1400" dirty="0"/>
           </a:p>
@@ -12644,7 +12644,7 @@
                 <a:ea typeface="Arial" pitchFamily="34" charset="-122"/>
                 <a:cs typeface="Arial" pitchFamily="34" charset="-120"/>
               </a:rPr>
-              <a:t>Ongoing ownership from year two: 0.2–0.3 FTE, ₱360k–₱540k a year. At 0.25 FTE the BCR falls to about 3.1.</a:t>
+              <a:t>Ongoing ownership from year two: 0.2–0.3 FTE, ₱360k–₱540k a year. At 0.25 FTE the cost is ₱3.31M and the BCR falls to 2.2 — still a yes.</a:t>
             </a:r>
             <a:endParaRPr lang="en-US" sz="1400" dirty="0"/>
           </a:p>
@@ -12709,7 +12709,7 @@
                 <a:ea typeface="Arial" pitchFamily="34" charset="-122"/>
                 <a:cs typeface="Arial" pitchFamily="34" charset="-120"/>
               </a:rPr>
-              <a:t>Annual run: Supabase ₱17,400 · Claude API ₱22,065 · email ₱8,700 · monitoring ₱6,960 · reconciliation ₱6,000.   Basis: BRD_V2 build-unit estimate and Growth-v2-CBA.xlsx — every figure is a live formula.</a:t>
+              <a:t>Annual run: Supabase ₱17,400 · Claude API ₱22,065 · email ₱8,700 · monitoring ₱6,960 · reconciliation ₱6,000.   Build phased across years one and two on the ship-promotion-first plan; IT's ₱1,785,500 covers both.</a:t>
             </a:r>
             <a:endParaRPr lang="en-US" sz="1400" dirty="0"/>
           </a:p>
@@ -12858,7 +12858,7 @@
                 <a:ea typeface="Arial" pitchFamily="34" charset="-122"/>
                 <a:cs typeface="Arial" pitchFamily="34" charset="-120"/>
               </a:rPr>
-              <a:t>Benefit–cost ratio 6.8. Payback in nine months.</a:t>
+              <a:t>Benefit–cost ratio 3.6. Payback in fifteen months.</a:t>
             </a:r>
             <a:endParaRPr lang="en-US" sz="3200" dirty="0"/>
           </a:p>
@@ -12897,7 +12897,7 @@
                 <a:ea typeface="Arial" pitchFamily="34" charset="-122"/>
                 <a:cs typeface="Arial" pitchFamily="34" charset="-120"/>
               </a:rPr>
-              <a:t>Three years, 10% discount rate. Break-even is one attributed internal hire a year.</a:t>
+              <a:t>Three years, 10% discount rate, on IT's costed build. Break-even is two attributed internal hires a year.</a:t>
             </a:r>
             <a:endParaRPr lang="en-US" sz="1600" dirty="0"/>
           </a:p>
@@ -13127,7 +13127,7 @@
                 <a:ea typeface="Arial" pitchFamily="34" charset="-122"/>
                 <a:cs typeface="Arial" pitchFamily="34" charset="-120"/>
               </a:rPr>
-              <a:t>₱6.08M</a:t>
+              <a:t>₱5.16M</a:t>
             </a:r>
             <a:endParaRPr lang="en-US" sz="3000" dirty="0"/>
           </a:p>
@@ -13284,7 +13284,7 @@
                 <a:ea typeface="Arial" pitchFamily="34" charset="-122"/>
                 <a:cs typeface="Arial" pitchFamily="34" charset="-120"/>
               </a:rPr>
-              <a:t>6.8</a:t>
+              <a:t>3.6</a:t>
             </a:r>
             <a:endParaRPr lang="en-US" sz="3000" dirty="0"/>
           </a:p>
@@ -13368,7 +13368,7 @@
                 <a:ea typeface="Arial" pitchFamily="34" charset="-122"/>
                 <a:cs typeface="Arial" pitchFamily="34" charset="-120"/>
               </a:rPr>
-              <a:t>NPV ₱4.84M at 10%</a:t>
+              <a:t>NPV ₱4.02M at 10%</a:t>
             </a:r>
             <a:endParaRPr lang="en-US" sz="1400" dirty="0"/>
           </a:p>
@@ -13441,7 +13441,7 @@
                 <a:ea typeface="Arial" pitchFamily="34" charset="-122"/>
                 <a:cs typeface="Arial" pitchFamily="34" charset="-120"/>
               </a:rPr>
-              <a:t>9 months</a:t>
+              <a:t>15 months</a:t>
             </a:r>
             <a:endParaRPr lang="en-US" sz="3000" dirty="0"/>
           </a:p>
@@ -14147,7 +14147,7 @@
                           <a:ea typeface="Arial" pitchFamily="34" charset="-122"/>
                           <a:cs typeface="Arial" pitchFamily="34" charset="-120"/>
                         </a:rPr>
-                        <a:t>₱4.07M</a:t>
+                        <a:t>₱3.16M</a:t>
                       </a:r>
                       <a:endParaRPr lang="en-US" sz="1400" dirty="0">
                         <a:latin typeface="Arial" charset="0"/>
@@ -14212,7 +14212,7 @@
                           <a:ea typeface="Arial" pitchFamily="34" charset="-122"/>
                           <a:cs typeface="Arial" pitchFamily="34" charset="-120"/>
                         </a:rPr>
-                        <a:t>4.9</a:t>
+                        <a:t>2.6</a:t>
                       </a:r>
                       <a:endParaRPr lang="en-US" sz="1400" dirty="0">
                         <a:latin typeface="Arial" charset="0"/>
@@ -14277,7 +14277,7 @@
                           <a:ea typeface="Arial" pitchFamily="34" charset="-122"/>
                           <a:cs typeface="Arial" pitchFamily="34" charset="-120"/>
                         </a:rPr>
-                        <a:t>12 mo</a:t>
+                        <a:t>18 mo</a:t>
                       </a:r>
                       <a:endParaRPr lang="en-US" sz="1400" dirty="0">
                         <a:latin typeface="Arial" charset="0"/>
@@ -14474,7 +14474,7 @@
                           <a:ea typeface="Arial" pitchFamily="34" charset="-122"/>
                           <a:cs typeface="Arial" pitchFamily="34" charset="-120"/>
                         </a:rPr>
-                        <a:t>₱6.08M</a:t>
+                        <a:t>₱5.16M</a:t>
                       </a:r>
                       <a:endParaRPr lang="en-US" sz="1400" dirty="0">
                         <a:latin typeface="Arial" charset="0"/>
@@ -14539,7 +14539,7 @@
                           <a:ea typeface="Arial" pitchFamily="34" charset="-122"/>
                           <a:cs typeface="Arial" pitchFamily="34" charset="-120"/>
                         </a:rPr>
-                        <a:t>6.8</a:t>
+                        <a:t>3.6</a:t>
                       </a:r>
                       <a:endParaRPr lang="en-US" sz="1400" dirty="0">
                         <a:latin typeface="Arial" charset="0"/>
@@ -14604,7 +14604,7 @@
                           <a:ea typeface="Arial" pitchFamily="34" charset="-122"/>
                           <a:cs typeface="Arial" pitchFamily="34" charset="-120"/>
                         </a:rPr>
-                        <a:t>9 mo</a:t>
+                        <a:t>15 mo</a:t>
                       </a:r>
                       <a:endParaRPr lang="en-US" sz="1400" dirty="0">
                         <a:latin typeface="Arial" charset="0"/>
@@ -14801,7 +14801,7 @@
                           <a:ea typeface="Arial" pitchFamily="34" charset="-122"/>
                           <a:cs typeface="Arial" pitchFamily="34" charset="-120"/>
                         </a:rPr>
-                        <a:t>₱9.09M</a:t>
+                        <a:t>₱8.18M</a:t>
                       </a:r>
                       <a:endParaRPr lang="en-US" sz="1400" dirty="0">
                         <a:latin typeface="Arial" charset="0"/>
@@ -14866,7 +14866,7 @@
                           <a:ea typeface="Arial" pitchFamily="34" charset="-122"/>
                           <a:cs typeface="Arial" pitchFamily="34" charset="-120"/>
                         </a:rPr>
-                        <a:t>9.7</a:t>
+                        <a:t>5.2</a:t>
                       </a:r>
                       <a:endParaRPr lang="en-US" sz="1400" dirty="0">
                         <a:latin typeface="Arial" charset="0"/>
@@ -14931,7 +14931,7 @@
                           <a:ea typeface="Arial" pitchFamily="34" charset="-122"/>
                           <a:cs typeface="Arial" pitchFamily="34" charset="-120"/>
                         </a:rPr>
-                        <a:t>7 mo</a:t>
+                        <a:t>12 mo</a:t>
                       </a:r>
                       <a:endParaRPr lang="en-US" sz="1400" dirty="0">
                         <a:latin typeface="Arial" charset="0"/>
@@ -15128,7 +15128,7 @@
                           <a:ea typeface="Arial" pitchFamily="34" charset="-122"/>
                           <a:cs typeface="Arial" pitchFamily="34" charset="-120"/>
                         </a:rPr>
-                        <a:t>₱2.97M</a:t>
+                        <a:t>₱2.05M</a:t>
                       </a:r>
                       <a:endParaRPr lang="en-US" sz="1400" dirty="0">
                         <a:latin typeface="Arial" charset="0"/>
@@ -15193,7 +15193,7 @@
                           <a:ea typeface="Arial" pitchFamily="34" charset="-122"/>
                           <a:cs typeface="Arial" pitchFamily="34" charset="-120"/>
                         </a:rPr>
-                        <a:t>3.8</a:t>
+                        <a:t>2.0</a:t>
                       </a:r>
                       <a:endParaRPr lang="en-US" sz="1400" dirty="0">
                         <a:latin typeface="Arial" charset="0"/>
@@ -15258,7 +15258,7 @@
                           <a:ea typeface="Arial" pitchFamily="34" charset="-122"/>
                           <a:cs typeface="Arial" pitchFamily="34" charset="-120"/>
                         </a:rPr>
-                        <a:t>14 mo</a:t>
+                        <a:t>21 mo</a:t>
                       </a:r>
                       <a:endParaRPr lang="en-US" sz="1400" dirty="0">
                         <a:latin typeface="Arial" charset="0"/>
@@ -15455,7 +15455,7 @@
                           <a:ea typeface="Arial" pitchFamily="34" charset="-122"/>
                           <a:cs typeface="Arial" pitchFamily="34" charset="-120"/>
                         </a:rPr>
-                        <a:t>₱2.06M</a:t>
+                        <a:t>₱1.15M</a:t>
                       </a:r>
                       <a:endParaRPr lang="en-US" sz="1400" dirty="0">
                         <a:latin typeface="Arial" charset="0"/>
@@ -15520,7 +15520,7 @@
                           <a:ea typeface="Arial" pitchFamily="34" charset="-122"/>
                           <a:cs typeface="Arial" pitchFamily="34" charset="-120"/>
                         </a:rPr>
-                        <a:t>3.0</a:t>
+                        <a:t>1.6</a:t>
                       </a:r>
                       <a:endParaRPr lang="en-US" sz="1400" dirty="0">
                         <a:latin typeface="Arial" charset="0"/>
@@ -15585,7 +15585,7 @@
                           <a:ea typeface="Arial" pitchFamily="34" charset="-122"/>
                           <a:cs typeface="Arial" pitchFamily="34" charset="-120"/>
                         </a:rPr>
-                        <a:t>16 mo</a:t>
+                        <a:t>25 mo</a:t>
                       </a:r>
                       <a:endParaRPr lang="en-US" sz="1400" dirty="0">
                         <a:latin typeface="Arial" charset="0"/>
@@ -15737,7 +15737,7 @@
                 <a:ea typeface="Arial" pitchFamily="34" charset="-122"/>
                 <a:cs typeface="Arial" pitchFamily="34" charset="-120"/>
               </a:rPr>
-              <a:t>Break-even: 1.0 hire a year</a:t>
+              <a:t>Break-even: 2 hires a year</a:t>
             </a:r>
             <a:endParaRPr lang="en-US" sz="1700" dirty="0"/>
           </a:p>
@@ -15779,7 +15779,7 @@
                 <a:ea typeface="Arial" pitchFamily="34" charset="-122"/>
                 <a:cs typeface="Arial" pitchFamily="34" charset="-120"/>
               </a:rPr>
-              <a:t>One internal fill out of roughly 60 internal requisitions a year — a 1.7% hit rate — repays the whole three-year cost.</a:t>
+              <a:t>Two internal fills out of roughly 60 internal requisitions a year — a 3.1% hit rate — repay the whole three-year cost.</a:t>
             </a:r>
             <a:endParaRPr lang="en-US" sz="1400" dirty="0"/>
           </a:p>
@@ -16153,7 +16153,7 @@
                 <a:ea typeface="Arial" pitchFamily="34" charset="-122"/>
                 <a:cs typeface="Arial" pitchFamily="34" charset="-120"/>
               </a:rPr>
-              <a:t>Ten to twenty-seven times cheaper than buying it.</a:t>
+              <a:t>Five to fourteen times cheaper than buying it.</a:t>
             </a:r>
             <a:endParaRPr lang="en-US" sz="3200" dirty="0"/>
           </a:p>
@@ -16281,7 +16281,7 @@
                 <a:ea typeface="Arial" pitchFamily="34" charset="-122"/>
                 <a:cs typeface="Arial" pitchFamily="34" charset="-120"/>
               </a:rPr>
-              <a:t>₱1.05M</a:t>
+              <a:t>₱1.96M</a:t>
             </a:r>
             <a:endParaRPr lang="en-US" sz="2400" dirty="0"/>
           </a:p>
@@ -16320,7 +16320,7 @@
                 <a:ea typeface="Arial" pitchFamily="34" charset="-122"/>
                 <a:cs typeface="Arial" pitchFamily="34" charset="-120"/>
               </a:rPr>
-              <a:t>Growth, built in-house · ₱1,649 per employee</a:t>
+              <a:t>Growth, built in-house · ₱3,081 per employee</a:t>
             </a:r>
             <a:endParaRPr lang="en-US" sz="1400" dirty="0"/>
           </a:p>
@@ -16505,7 +16505,7 @@
                 <a:ea typeface="Arial" pitchFamily="34" charset="-122"/>
                 <a:cs typeface="Arial" pitchFamily="34" charset="-120"/>
               </a:rPr>
-              <a:t>₱9.1M – ₱26.8M</a:t>
+              <a:t>₱8.2M – ₱25.9M</a:t>
             </a:r>
             <a:endParaRPr lang="en-US" sz="2400" dirty="0"/>
           </a:p>
@@ -16889,7 +16889,7 @@
                 <a:ea typeface="Arial" pitchFamily="34" charset="-122"/>
                 <a:cs typeface="Arial" pitchFamily="34" charset="-120"/>
               </a:rPr>
-              <a:t>3</a:t>
+              <a:t>6</a:t>
             </a:r>
             <a:endParaRPr lang="en-US" sz="3600" dirty="0"/>
           </a:p>
@@ -16970,7 +16970,7 @@
                 <a:ea typeface="Arial" pitchFamily="34" charset="-122"/>
                 <a:cs typeface="Arial" pitchFamily="34" charset="-120"/>
               </a:rPr>
-              <a:t>internal hires over 3 years — one a year</a:t>
+              <a:t>internal hires over 3 years — two a year</a:t>
             </a:r>
             <a:endParaRPr lang="en-US" sz="1400" dirty="0"/>
           </a:p>
@@ -19016,7 +19016,7 @@
                           <a:ea typeface="Arial" pitchFamily="34" charset="-122"/>
                           <a:cs typeface="Arial" pitchFamily="34" charset="-120"/>
                         </a:rPr>
-                        <a:t>17.6%</a:t>
+                        <a:t>16.9%</a:t>
                       </a:r>
                       <a:endParaRPr lang="en-US" sz="1400" dirty="0">
                         <a:latin typeface="Arial" charset="0"/>
@@ -20873,7 +20873,7 @@
                 <a:ea typeface="Arial" pitchFamily="34" charset="-122"/>
                 <a:cs typeface="Arial" pitchFamily="34" charset="-120"/>
               </a:rPr>
-              <a:t>Our eNPS on growth opportunity is already healthy, so this is not a fix for a broken career ladder. Nor should internal fill reach 100% — some external hiring brings skills we need. We target the gap between 17.6% and the benchmark.</a:t>
+              <a:t>Our eNPS on growth opportunity is already healthy, so this is not a fix for a broken career ladder. Nor should internal fill reach 100% — some external hiring brings skills we need. We target the gap between 16.9% and the benchmark.</a:t>
             </a:r>
             <a:endParaRPr lang="en-US" sz="1400" dirty="0"/>
           </a:p>
@@ -20981,7 +20981,7 @@
                 <a:ea typeface="Arial" pitchFamily="34" charset="-122"/>
                 <a:cs typeface="Arial" pitchFamily="34" charset="-120"/>
               </a:rPr>
-              <a:t>Three months, 637 employees in IT, Operations and P&amp;C, on Band B pivots and Band C lateral moves. Judged on fills and savings. If the fill rate has not moved by month three, we stop and say so.</a:t>
+              <a:t>Three months, 637 employees in IT, Operations and HR, on Band B pivots and Band C lateral moves. Judged on fills and savings. If the fill rate has not moved by month three, we stop and say so.</a:t>
             </a:r>
             <a:endParaRPr lang="en-US" sz="1400" dirty="0"/>
           </a:p>
@@ -21342,7 +21342,7 @@
                 <a:ea typeface="Arial" pitchFamily="34" charset="-122"/>
                 <a:cs typeface="Arial" pitchFamily="34" charset="-120"/>
               </a:rPr>
-              <a:t>We fill 17.6% of roles internally against a ~30% benchmark. In 2025 we spent ₱13.4M hiring, ₱6.1M of it to headhunters for Band C alone — while 88% of our people say they can grow here.</a:t>
+              <a:t>We fill 16.9% of roles internally against a ~30% benchmark. In 2025 we spent ₱13.4M hiring, ₱6.1M of it to headhunters for Band C alone — while 88% of our people say they can grow here.</a:t>
             </a:r>
             <a:endParaRPr lang="en-US" sz="1400" dirty="0"/>
           </a:p>
@@ -21558,7 +21558,7 @@
                 <a:ea typeface="Arial" pitchFamily="34" charset="-122"/>
                 <a:cs typeface="Arial" pitchFamily="34" charset="-120"/>
               </a:rPr>
-              <a:t>₱1.05M over three years for a 637-person pilot — ₱550 per employee a year. Benefit ₱7.1M, benefit–cost ratio 6.8, payback in 9 months. Buying Gloat or Fuel50 costs ₱10.2M–₱27.8M.</a:t>
+              <a:t>₱1.96M over three years for a 637-person pilot, on IT's costed build. Benefit ₱7.13M, benefit–cost ratio 3.6, payback in 15 months. Buying Gloat or Fuel50 costs ₱10.2M–₱27.8M.</a:t>
             </a:r>
             <a:endParaRPr lang="en-US" sz="1400" dirty="0"/>
           </a:p>
@@ -21666,7 +21666,7 @@
                 <a:ea typeface="Arial" pitchFamily="34" charset="-122"/>
                 <a:cs typeface="Arial" pitchFamily="34" charset="-120"/>
               </a:rPr>
-              <a:t>Approve the ₱766k year-one build and a three-month pilot in IT, Operations and People &amp; Culture. And ask recruitment for one new source value in HC Connect — free to them, and what makes the benefit provable.</a:t>
+              <a:t>Approve the ₱1.51M year one and a three-month pilot in IT, Operations and HR. And ask recruitment for one new source value in HC Connect — free to them, and what makes the benefit provable.</a:t>
             </a:r>
             <a:endParaRPr lang="en-US" sz="1400" dirty="0"/>
           </a:p>
@@ -24262,7 +24262,7 @@
                 <a:ea typeface="Arial" pitchFamily="34" charset="-122"/>
                 <a:cs typeface="Arial" pitchFamily="34" charset="-120"/>
               </a:rPr>
-              <a:t>₱766,125</a:t>
+              <a:t>₱1.51M</a:t>
             </a:r>
             <a:endParaRPr lang="en-US" sz="2200" dirty="0"/>
           </a:p>
@@ -24346,7 +24346,7 @@
                 <a:ea typeface="Arial" pitchFamily="34" charset="-122"/>
                 <a:cs typeface="Arial" pitchFamily="34" charset="-120"/>
               </a:rPr>
-              <a:t>₱766,125 to build and run Growth for 637 employees for twelve months — then a go / no-go on the pilot numbers.</a:t>
+              <a:t>₱1,509,325 to build and run Growth for 637 employees for twelve months — then a go / no-go on the pilot numbers.</a:t>
             </a:r>
             <a:endParaRPr lang="en-US" sz="1500" dirty="0"/>
           </a:p>
@@ -24934,7 +24934,7 @@
                 <a:ea typeface="Arial" pitchFamily="34" charset="-122"/>
                 <a:cs typeface="Arial" pitchFamily="34" charset="-120"/>
               </a:rPr>
-              <a:t>Pilot live in IT, Operations and P&amp;C</a:t>
+              <a:t>Pilot live in IT, Operations and HR</a:t>
             </a:r>
             <a:endParaRPr lang="en-US" sz="1400" dirty="0"/>
           </a:p>
@@ -25146,7 +25146,7 @@
                 <a:ea typeface="Arial" pitchFamily="34" charset="-122"/>
                 <a:cs typeface="Arial" pitchFamily="34" charset="-120"/>
               </a:rPr>
-              <a:t>Year-one figure includes build ₱711,000 and run ₱55,125. Years two and three add ₱223,125 and ₱61,125.</a:t>
+              <a:t>Year one is build ₱1,454,200 plus run ₱55,125, from IT's costed ₱1,785,500. Years two and three add ₱392,425 and ₱61,125.</a:t>
             </a:r>
             <a:endParaRPr lang="en-US" sz="1400" dirty="0"/>
           </a:p>
@@ -25390,7 +25390,7 @@
                 <a:ea typeface="Arial" pitchFamily="34" charset="-122"/>
                 <a:cs typeface="Arial" pitchFamily="34" charset="-120"/>
               </a:rPr>
-              <a:t>₱1.05M over three years to stop doing that. Benefit–cost ratio 6.8, payback in nine months, and a live skills map we have never had.</a:t>
+              <a:t>₱1.96M over three years to stop doing that. Benefit–cost ratio 3.6, payback in fifteen months, and a live skills map we have never had.</a:t>
             </a:r>
             <a:endParaRPr lang="en-US" sz="1900" dirty="0"/>
           </a:p>
@@ -27381,7 +27381,7 @@
                 <a:ea typeface="Arial" pitchFamily="34" charset="-122"/>
                 <a:cs typeface="Arial" pitchFamily="34" charset="-120"/>
               </a:rPr>
-              <a:t>17.6% internal fill vs ~30%</a:t>
+              <a:t>16.9% internal fill vs ~30%</a:t>
             </a:r>
             <a:endParaRPr lang="en-US" sz="1400" dirty="0"/>
           </a:p>
@@ -28384,7 +28384,7 @@
                 <a:ea typeface="Arial" pitchFamily="34" charset="-122"/>
                 <a:cs typeface="Arial" pitchFamily="34" charset="-120"/>
               </a:rPr>
-              <a:t>Programme owner in P&amp;C</a:t>
+              <a:t>Programme owner in HR</a:t>
             </a:r>
             <a:endParaRPr lang="en-US" sz="1400" dirty="0"/>
           </a:p>
@@ -28718,7 +28718,7 @@
                 <a:ea typeface="Arial" pitchFamily="34" charset="-122"/>
                 <a:cs typeface="Arial" pitchFamily="34" charset="-120"/>
               </a:rPr>
-              <a:t>₱711k one-time build</a:t>
+              <a:t>₱1.79M build, costed by IT</a:t>
             </a:r>
             <a:endParaRPr lang="en-US" sz="1400" dirty="0"/>
           </a:p>
@@ -28766,7 +28766,7 @@
                 <a:ea typeface="Arial" pitchFamily="34" charset="-122"/>
                 <a:cs typeface="Arial" pitchFamily="34" charset="-120"/>
               </a:rPr>
-              <a:t>0.2–0.3 FTE programme ownership from year two</a:t>
+              <a:t>0.2–0.3 FTE ownership from year two</a:t>
             </a:r>
             <a:endParaRPr lang="en-US" sz="1400" dirty="0"/>
           </a:p>
@@ -33270,7 +33270,7 @@
                 <a:ea typeface="Arial" pitchFamily="34" charset="-122"/>
                 <a:cs typeface="Arial" pitchFamily="34" charset="-120"/>
               </a:rPr>
-              <a:t>Internal job posting data, 2024–2026 — 1,008 vacancies, 463 internal applicants, 170 accepted.</a:t>
+              <a:t>Internal job posting data, 2024–2026 — 1,008 vacancies, 463 internal applicants, 170 accepted: a 16.9% internal fill rate.</a:t>
             </a:r>
             <a:endParaRPr lang="en-US" sz="1400" dirty="0"/>
           </a:p>
@@ -33557,7 +33557,7 @@
                 <a:ea typeface="Arial" pitchFamily="34" charset="-122"/>
                 <a:cs typeface="Arial" pitchFamily="34" charset="-120"/>
               </a:rPr>
-              <a:t>Build estimate is bottom-up from the completed BRD at ₱150k per developer-month. Not yet validated by IT.</a:t>
+              <a:t>Build costed by IT in man-hours at ₱1,785,500, phased ₱1,454,200 in year one and ₱331,300 in year two.</a:t>
             </a:r>
             <a:endParaRPr lang="en-US" sz="1400" dirty="0"/>
           </a:p>
@@ -34208,7 +34208,7 @@
                 <a:ea typeface="Arial" pitchFamily="34" charset="-122"/>
                 <a:cs typeface="Arial" pitchFamily="34" charset="-120"/>
               </a:rPr>
-              <a:t>17.6%</a:t>
+              <a:t>16.9%</a:t>
             </a:r>
             <a:endParaRPr lang="en-US" sz="3000" dirty="0"/>
           </a:p>
@@ -34953,7 +34953,7 @@
                 <a:ea typeface="Arial" pitchFamily="34" charset="-122"/>
                 <a:cs typeface="Arial" pitchFamily="34" charset="-120"/>
               </a:rPr>
-              <a:t>Business problem:  raise internal mobility from 17.6% to the 30% benchmark by making opportunities visible and matching people to them intelligently.</a:t>
+              <a:t>Business problem:  raise internal mobility from 16.9% to the 30% benchmark by making opportunities visible and matching people to them intelligently.</a:t>
             </a:r>
             <a:endParaRPr lang="en-US" sz="1700" dirty="0"/>
           </a:p>
@@ -42775,7 +42775,7 @@
                 <a:ea typeface="Arial" pitchFamily="34" charset="-122"/>
                 <a:cs typeface="Arial" pitchFamily="34" charset="-120"/>
               </a:rPr>
-              <a:t>STRATEGIC ALIGNMENT · PEOPLE &amp; CULTURE</a:t>
+              <a:t>STRATEGIC ALIGNMENT · HR</a:t>
             </a:r>
             <a:endParaRPr lang="en-US" sz="1400" dirty="0"/>
           </a:p>
@@ -43768,7 +43768,7 @@
                 <a:ea typeface="Arial" pitchFamily="34" charset="-122"/>
                 <a:cs typeface="Arial" pitchFamily="34" charset="-120"/>
               </a:rPr>
-              <a:t>Not another HR service to staff — a self-service layer that takes work off Tier 1 and feeds the Talent Acquisition and People &amp; Culture COEs a live view of internal supply.</a:t>
+              <a:t>Not another HR service to staff — a self-service layer that takes work off Tier 1 and feeds the Talent Acquisition and Capability Development COEs a live view of internal supply.</a:t>
             </a:r>
             <a:endParaRPr lang="en-US" sz="1500" dirty="0"/>
           </a:p>

--- a/docs/Growth_Talent_Marketplace_ALP.pptx
+++ b/docs/Growth_Talent_Marketplace_ALP.pptx
@@ -22992,7 +22992,7 @@
                 <a:ea typeface="Arial" pitchFamily="34" charset="-122"/>
                 <a:cs typeface="Arial" pitchFamily="34" charset="-120"/>
               </a:rPr>
-              <a:t>Batch-load from the HRIS and the LMS. Correcting a list beats authoring one.</a:t>
+              <a:t>Pre-load from HRIS and MyDevelopment. Correcting beats authoring.</a:t>
             </a:r>
             <a:endParaRPr lang="en-US" sz="1400" dirty="0"/>
           </a:p>

--- a/docs/Growth_Talent_Marketplace_ALP.pptx
+++ b/docs/Growth_Talent_Marketplace_ALP.pptx
@@ -16179,7 +16179,7 @@
                 <a:ea typeface="Arial" pitchFamily="34" charset="-122"/>
                 <a:cs typeface="Arial" pitchFamily="34" charset="-120"/>
               </a:rPr>
-              <a:t>Two internal fills out of roughly 60 internal requisitions a year — a 3.1% hit rate — repay the whole three-year cost.</a:t>
+              <a:t>Two internal fills out of roughly 60 internal requisitions a year — a 3.3% hit rate — repay the whole three-year cost.</a:t>
             </a:r>
             <a:endParaRPr lang="en-US" sz="1400" dirty="0"/>
           </a:p>

--- a/docs/Growth_Talent_Marketplace_ALP.pptx
+++ b/docs/Growth_Talent_Marketplace_ALP.pptx
@@ -1408,7 +1408,7 @@
           <a:p>
             <a:r>
               <a:rPr lang="en-US" dirty="0"/>
-              <a:t>Lead with the two italic rows. Volunteering that the softest input can be deleted entirely and the case still clears at 2.0 is what makes the other numbers believable. If challenged on the drop from the earlier 6.8: that used our planning estimate; this uses IT's costed man-hours, and the case still clears every stress case.</a:t>
+              <a:t>Say the 0.5 row out loud before anyone finds it. We repriced a fill from an unsourced ₱350,000 agency fee down to ₱113,522 — what TA actually spends plus 37 vacancy days on real Payroll salaries. That honesty costs us the attributed half of the case and moves the weight onto retention, which is why the year-one holdout is now a gate on wave two rather than a research nicety. Everything else survives: delete mass operations, 3.8; refuse the vacancy-day credit, 3.6; lose attribution entirely, 3.5.</a:t>
             </a:r>
             <a:endParaRPr lang="en-US" dirty="0"/>
           </a:p>
@@ -8189,7 +8189,7 @@
                 <a:ea typeface="Arial" pitchFamily="34" charset="-122"/>
                 <a:cs typeface="Arial" pitchFamily="34" charset="-120"/>
               </a:rPr>
-              <a:t>₱86,796 saved on every Band C internal fill. It pays for itself on Band C alone.</a:t>
+              <a:t>₱193,877 avoided on every Band C internal fill — hiring cost plus 37 vacancy days.</a:t>
             </a:r>
             <a:endParaRPr lang="en-US" sz="1400" dirty="0"/>
           </a:p>
@@ -12970,7 +12970,7 @@
                 <a:ea typeface="Arial" pitchFamily="34" charset="-122"/>
                 <a:cs typeface="Arial" pitchFamily="34" charset="-120"/>
               </a:rPr>
-              <a:t>Ratio 3.8, payback in fourteen months.</a:t>
+              <a:t>Ratio 4.0, payback in thirteen months.</a:t>
             </a:r>
             <a:endParaRPr lang="en-US" sz="3200" dirty="0"/>
           </a:p>
@@ -13009,7 +13009,7 @@
                 <a:ea typeface="Arial" pitchFamily="34" charset="-122"/>
                 <a:cs typeface="Arial" pitchFamily="34" charset="-120"/>
               </a:rPr>
-              <a:t>Three years, 10% discount rate, on IT's costed build. Break-even is two attributed internal hires a year.</a:t>
+              <a:t>Three years, 10% discount rate, on IT's costed build. Break-even is six attributed internal fills a year.</a:t>
             </a:r>
             <a:endParaRPr lang="en-US" sz="1600" dirty="0"/>
           </a:p>
@@ -13082,7 +13082,7 @@
                 <a:ea typeface="Arial" pitchFamily="34" charset="-122"/>
                 <a:cs typeface="Arial" pitchFamily="34" charset="-120"/>
               </a:rPr>
-              <a:t>₱7.88M</a:t>
+              <a:t>₱8.29M</a:t>
             </a:r>
             <a:endParaRPr lang="en-US" sz="3000" dirty="0"/>
           </a:p>
@@ -13166,7 +13166,7 @@
                 <a:ea typeface="Arial" pitchFamily="34" charset="-122"/>
                 <a:cs typeface="Arial" pitchFamily="34" charset="-120"/>
               </a:rPr>
-              <a:t>hires + retention</a:t>
+              <a:t>fills + retention</a:t>
             </a:r>
             <a:endParaRPr lang="en-US" sz="1400" dirty="0"/>
           </a:p>
@@ -13239,7 +13239,7 @@
                 <a:ea typeface="Arial" pitchFamily="34" charset="-122"/>
                 <a:cs typeface="Arial" pitchFamily="34" charset="-120"/>
               </a:rPr>
-              <a:t>₱5.83M</a:t>
+              <a:t>₱6.24M</a:t>
             </a:r>
             <a:endParaRPr lang="en-US" sz="3000" dirty="0"/>
           </a:p>
@@ -13396,7 +13396,7 @@
                 <a:ea typeface="Arial" pitchFamily="34" charset="-122"/>
                 <a:cs typeface="Arial" pitchFamily="34" charset="-120"/>
               </a:rPr>
-              <a:t>3.8</a:t>
+              <a:t>4.0</a:t>
             </a:r>
             <a:endParaRPr lang="en-US" sz="3000" dirty="0"/>
           </a:p>
@@ -13480,7 +13480,7 @@
                 <a:ea typeface="Arial" pitchFamily="34" charset="-122"/>
                 <a:cs typeface="Arial" pitchFamily="34" charset="-120"/>
               </a:rPr>
-              <a:t>NPV ₱4.56M at 10%</a:t>
+              <a:t>NPV ₱4.89M at 10%</a:t>
             </a:r>
             <a:endParaRPr lang="en-US" sz="1400" dirty="0"/>
           </a:p>
@@ -13553,7 +13553,7 @@
                 <a:ea typeface="Arial" pitchFamily="34" charset="-122"/>
                 <a:cs typeface="Arial" pitchFamily="34" charset="-120"/>
               </a:rPr>
-              <a:t>14 months</a:t>
+              <a:t>13 months</a:t>
             </a:r>
             <a:endParaRPr lang="en-US" sz="3000" dirty="0"/>
           </a:p>
@@ -13749,7 +13749,7 @@
                 <a:ea typeface="Arial" pitchFamily="34" charset="-122"/>
                 <a:cs typeface="Arial" pitchFamily="34" charset="-120"/>
               </a:rPr>
-              <a:t>The case survives the removal of either benefit stream.</a:t>
+              <a:t>Retention carries the case. Everything else can be deleted.</a:t>
             </a:r>
             <a:endParaRPr lang="en-US" sz="1400" dirty="0"/>
           </a:p>
@@ -14129,7 +14129,7 @@
                           <a:ea typeface="Arial" pitchFamily="34" charset="-122"/>
                           <a:cs typeface="Arial" pitchFamily="34" charset="-120"/>
                         </a:rPr>
-                        <a:t>Conservative · 2 hires/yr</a:t>
+                        <a:t>Conservative · 2 fills/yr</a:t>
                       </a:r>
                       <a:endParaRPr lang="en-US" sz="1400" dirty="0">
                         <a:latin typeface="Arial" charset="0"/>
@@ -14194,7 +14194,7 @@
                           <a:ea typeface="Arial" pitchFamily="34" charset="-122"/>
                           <a:cs typeface="Arial" pitchFamily="34" charset="-120"/>
                         </a:rPr>
-                        <a:t>₱5.87M</a:t>
+                        <a:t>₱7.74M</a:t>
                       </a:r>
                       <a:endParaRPr lang="en-US" sz="1400" dirty="0">
                         <a:latin typeface="Arial" charset="0"/>
@@ -14259,7 +14259,7 @@
                           <a:ea typeface="Arial" pitchFamily="34" charset="-122"/>
                           <a:cs typeface="Arial" pitchFamily="34" charset="-120"/>
                         </a:rPr>
-                        <a:t>₱3.82M</a:t>
+                        <a:t>₱5.69M</a:t>
                       </a:r>
                       <a:endParaRPr lang="en-US" sz="1400" dirty="0">
                         <a:latin typeface="Arial" charset="0"/>
@@ -14324,7 +14324,7 @@
                           <a:ea typeface="Arial" pitchFamily="34" charset="-122"/>
                           <a:cs typeface="Arial" pitchFamily="34" charset="-120"/>
                         </a:rPr>
-                        <a:t>2.9</a:t>
+                        <a:t>3.8</a:t>
                       </a:r>
                       <a:endParaRPr lang="en-US" sz="1400" dirty="0">
                         <a:latin typeface="Arial" charset="0"/>
@@ -14389,7 +14389,7 @@
                           <a:ea typeface="Arial" pitchFamily="34" charset="-122"/>
                           <a:cs typeface="Arial" pitchFamily="34" charset="-120"/>
                         </a:rPr>
-                        <a:t>17 mo</a:t>
+                        <a:t>14 mo</a:t>
                       </a:r>
                       <a:endParaRPr lang="en-US" sz="1400" dirty="0">
                         <a:latin typeface="Arial" charset="0"/>
@@ -14456,7 +14456,7 @@
                           <a:ea typeface="Arial" pitchFamily="34" charset="-122"/>
                           <a:cs typeface="Arial" pitchFamily="34" charset="-120"/>
                         </a:rPr>
-                        <a:t>Base · 4 hires/yr</a:t>
+                        <a:t>Base · 4 fills/yr</a:t>
                       </a:r>
                       <a:endParaRPr lang="en-US" sz="1400" dirty="0">
                         <a:latin typeface="Arial" charset="0"/>
@@ -14521,7 +14521,7 @@
                           <a:ea typeface="Arial" pitchFamily="34" charset="-122"/>
                           <a:cs typeface="Arial" pitchFamily="34" charset="-120"/>
                         </a:rPr>
-                        <a:t>₱7.88M</a:t>
+                        <a:t>₱8.29M</a:t>
                       </a:r>
                       <a:endParaRPr lang="en-US" sz="1400" dirty="0">
                         <a:latin typeface="Arial" charset="0"/>
@@ -14586,7 +14586,7 @@
                           <a:ea typeface="Arial" pitchFamily="34" charset="-122"/>
                           <a:cs typeface="Arial" pitchFamily="34" charset="-120"/>
                         </a:rPr>
-                        <a:t>₱5.83M</a:t>
+                        <a:t>₱6.24M</a:t>
                       </a:r>
                       <a:endParaRPr lang="en-US" sz="1400" dirty="0">
                         <a:latin typeface="Arial" charset="0"/>
@@ -14651,7 +14651,7 @@
                           <a:ea typeface="Arial" pitchFamily="34" charset="-122"/>
                           <a:cs typeface="Arial" pitchFamily="34" charset="-120"/>
                         </a:rPr>
-                        <a:t>3.8</a:t>
+                        <a:t>4.0</a:t>
                       </a:r>
                       <a:endParaRPr lang="en-US" sz="1400" dirty="0">
                         <a:latin typeface="Arial" charset="0"/>
@@ -14716,7 +14716,7 @@
                           <a:ea typeface="Arial" pitchFamily="34" charset="-122"/>
                           <a:cs typeface="Arial" pitchFamily="34" charset="-120"/>
                         </a:rPr>
-                        <a:t>14 mo</a:t>
+                        <a:t>13 mo</a:t>
                       </a:r>
                       <a:endParaRPr lang="en-US" sz="1400" dirty="0">
                         <a:latin typeface="Arial" charset="0"/>
@@ -14783,7 +14783,7 @@
                           <a:ea typeface="Arial" pitchFamily="34" charset="-122"/>
                           <a:cs typeface="Arial" pitchFamily="34" charset="-120"/>
                         </a:rPr>
-                        <a:t>Optimistic · 7 hires/yr</a:t>
+                        <a:t>Optimistic · 7 fills/yr</a:t>
                       </a:r>
                       <a:endParaRPr lang="en-US" sz="1400" dirty="0">
                         <a:latin typeface="Arial" charset="0"/>
@@ -14848,7 +14848,7 @@
                           <a:ea typeface="Arial" pitchFamily="34" charset="-122"/>
                           <a:cs typeface="Arial" pitchFamily="34" charset="-120"/>
                         </a:rPr>
-                        <a:t>₱10.89M</a:t>
+                        <a:t>₱9.11M</a:t>
                       </a:r>
                       <a:endParaRPr lang="en-US" sz="1400" dirty="0">
                         <a:latin typeface="Arial" charset="0"/>
@@ -14913,7 +14913,7 @@
                           <a:ea typeface="Arial" pitchFamily="34" charset="-122"/>
                           <a:cs typeface="Arial" pitchFamily="34" charset="-120"/>
                         </a:rPr>
-                        <a:t>₱8.84M</a:t>
+                        <a:t>₱7.06M</a:t>
                       </a:r>
                       <a:endParaRPr lang="en-US" sz="1400" dirty="0">
                         <a:latin typeface="Arial" charset="0"/>
@@ -14978,7 +14978,7 @@
                           <a:ea typeface="Arial" pitchFamily="34" charset="-122"/>
                           <a:cs typeface="Arial" pitchFamily="34" charset="-120"/>
                         </a:rPr>
-                        <a:t>5.3</a:t>
+                        <a:t>4.4</a:t>
                       </a:r>
                       <a:endParaRPr lang="en-US" sz="1400" dirty="0">
                         <a:latin typeface="Arial" charset="0"/>
@@ -15043,7 +15043,7 @@
                           <a:ea typeface="Arial" pitchFamily="34" charset="-122"/>
                           <a:cs typeface="Arial" pitchFamily="34" charset="-120"/>
                         </a:rPr>
-                        <a:t>11 mo</a:t>
+                        <a:t>13 mo</a:t>
                       </a:r>
                       <a:endParaRPr lang="en-US" sz="1400" dirty="0">
                         <a:latin typeface="Arial" charset="0"/>
@@ -15175,7 +15175,7 @@
                           <a:ea typeface="Arial" pitchFamily="34" charset="-122"/>
                           <a:cs typeface="Arial" pitchFamily="34" charset="-120"/>
                         </a:rPr>
-                        <a:t>₱4.02M</a:t>
+                        <a:t>₱1.09M</a:t>
                       </a:r>
                       <a:endParaRPr lang="en-US" sz="1400" dirty="0">
                         <a:latin typeface="Arial" charset="0"/>
@@ -15240,7 +15240,72 @@
                           <a:ea typeface="Arial" pitchFamily="34" charset="-122"/>
                           <a:cs typeface="Arial" pitchFamily="34" charset="-120"/>
                         </a:rPr>
-                        <a:t>₱1.97M</a:t>
+                        <a:t>−₱0.96M</a:t>
+                      </a:r>
+                      <a:endParaRPr lang="en-US" sz="1400" dirty="0">
+                        <a:latin typeface="Arial" charset="0"/>
+                        <a:ea typeface="Arial" charset="0"/>
+                        <a:cs typeface="Arial" charset="0"/>
+                      </a:endParaRPr>
+                    </a:p>
+                  </a:txBody>
+                  <a:tcPr marL="91440" marR="91440" marT="45720" marB="45720" anchor="ctr">
+                    <a:lnL w="12700" cap="flat" cmpd="sng" algn="ctr">
+                      <a:solidFill>
+                        <a:srgbClr val="F1F5F9"/>
+                      </a:solidFill>
+                      <a:prstDash val="solid"/>
+                      <a:round/>
+                      <a:headEnd type="none" w="med" len="med"/>
+                      <a:tailEnd type="none" w="med" len="med"/>
+                    </a:lnL>
+                    <a:lnR w="12700" cap="flat" cmpd="sng" algn="ctr">
+                      <a:solidFill>
+                        <a:srgbClr val="F1F5F9"/>
+                      </a:solidFill>
+                      <a:prstDash val="solid"/>
+                      <a:round/>
+                      <a:headEnd type="none" w="med" len="med"/>
+                      <a:tailEnd type="none" w="med" len="med"/>
+                    </a:lnR>
+                    <a:lnT w="12700" cap="flat" cmpd="sng" algn="ctr">
+                      <a:solidFill>
+                        <a:srgbClr val="F1F5F9"/>
+                      </a:solidFill>
+                      <a:prstDash val="solid"/>
+                      <a:round/>
+                      <a:headEnd type="none" w="med" len="med"/>
+                      <a:tailEnd type="none" w="med" len="med"/>
+                    </a:lnT>
+                    <a:lnB w="12700" cap="flat" cmpd="sng" algn="ctr">
+                      <a:solidFill>
+                        <a:srgbClr val="F1F5F9"/>
+                      </a:solidFill>
+                      <a:prstDash val="solid"/>
+                      <a:round/>
+                      <a:headEnd type="none" w="med" len="med"/>
+                      <a:tailEnd type="none" w="med" len="med"/>
+                    </a:lnB>
+                  </a:tcPr>
+                </a:tc>
+                <a:tc>
+                  <a:txBody>
+                    <a:bodyPr/>
+                    <a:lstStyle/>
+                    <a:p>
+                      <a:pPr algn="r" indent="0" marL="0">
+                        <a:buNone/>
+                      </a:pPr>
+                      <a:r>
+                        <a:rPr lang="en-US" sz="1400" i="1" dirty="0">
+                          <a:solidFill>
+                            <a:srgbClr val="C00000"/>
+                          </a:solidFill>
+                          <a:latin typeface="Arial" pitchFamily="34" charset="0"/>
+                          <a:ea typeface="Arial" pitchFamily="34" charset="-122"/>
+                          <a:cs typeface="Arial" pitchFamily="34" charset="-120"/>
+                        </a:rPr>
+                        <a:t>0.5</a:t>
                       </a:r>
                       <a:endParaRPr lang="en-US" sz="1400" dirty="0">
                         <a:latin typeface="Arial" charset="0"/>
@@ -15305,72 +15370,7 @@
                           <a:ea typeface="Arial" pitchFamily="34" charset="-122"/>
                           <a:cs typeface="Arial" pitchFamily="34" charset="-120"/>
                         </a:rPr>
-                        <a:t>2.0</a:t>
-                      </a:r>
-                      <a:endParaRPr lang="en-US" sz="1400" dirty="0">
-                        <a:latin typeface="Arial" charset="0"/>
-                        <a:ea typeface="Arial" charset="0"/>
-                        <a:cs typeface="Arial" charset="0"/>
-                      </a:endParaRPr>
-                    </a:p>
-                  </a:txBody>
-                  <a:tcPr marL="91440" marR="91440" marT="45720" marB="45720" anchor="ctr">
-                    <a:lnL w="12700" cap="flat" cmpd="sng" algn="ctr">
-                      <a:solidFill>
-                        <a:srgbClr val="F1F5F9"/>
-                      </a:solidFill>
-                      <a:prstDash val="solid"/>
-                      <a:round/>
-                      <a:headEnd type="none" w="med" len="med"/>
-                      <a:tailEnd type="none" w="med" len="med"/>
-                    </a:lnL>
-                    <a:lnR w="12700" cap="flat" cmpd="sng" algn="ctr">
-                      <a:solidFill>
-                        <a:srgbClr val="F1F5F9"/>
-                      </a:solidFill>
-                      <a:prstDash val="solid"/>
-                      <a:round/>
-                      <a:headEnd type="none" w="med" len="med"/>
-                      <a:tailEnd type="none" w="med" len="med"/>
-                    </a:lnR>
-                    <a:lnT w="12700" cap="flat" cmpd="sng" algn="ctr">
-                      <a:solidFill>
-                        <a:srgbClr val="F1F5F9"/>
-                      </a:solidFill>
-                      <a:prstDash val="solid"/>
-                      <a:round/>
-                      <a:headEnd type="none" w="med" len="med"/>
-                      <a:tailEnd type="none" w="med" len="med"/>
-                    </a:lnT>
-                    <a:lnB w="12700" cap="flat" cmpd="sng" algn="ctr">
-                      <a:solidFill>
-                        <a:srgbClr val="F1F5F9"/>
-                      </a:solidFill>
-                      <a:prstDash val="solid"/>
-                      <a:round/>
-                      <a:headEnd type="none" w="med" len="med"/>
-                      <a:tailEnd type="none" w="med" len="med"/>
-                    </a:lnB>
-                  </a:tcPr>
-                </a:tc>
-                <a:tc>
-                  <a:txBody>
-                    <a:bodyPr/>
-                    <a:lstStyle/>
-                    <a:p>
-                      <a:pPr algn="r" indent="0" marL="0">
-                        <a:buNone/>
-                      </a:pPr>
-                      <a:r>
-                        <a:rPr lang="en-US" sz="1400" i="1" dirty="0">
-                          <a:solidFill>
-                            <a:srgbClr val="374151"/>
-                          </a:solidFill>
-                          <a:latin typeface="Arial" pitchFamily="34" charset="0"/>
-                          <a:ea typeface="Arial" pitchFamily="34" charset="-122"/>
-                          <a:cs typeface="Arial" pitchFamily="34" charset="-120"/>
-                        </a:rPr>
-                        <a:t>22 mo</a:t>
+                        <a:t>—</a:t>
                       </a:r>
                       <a:endParaRPr lang="en-US" sz="1400" dirty="0">
                         <a:latin typeface="Arial" charset="0"/>
@@ -15437,7 +15437,7 @@
                           <a:ea typeface="Arial" pitchFamily="34" charset="-122"/>
                           <a:cs typeface="Arial" pitchFamily="34" charset="-120"/>
                         </a:rPr>
-                        <a:t>Retention only, no hires</a:t>
+                        <a:t>Retention only, no fills</a:t>
                       </a:r>
                       <a:endParaRPr lang="en-US" sz="1400" dirty="0">
                         <a:latin typeface="Arial" charset="0"/>
@@ -15502,7 +15502,7 @@
                           <a:ea typeface="Arial" pitchFamily="34" charset="-122"/>
                           <a:cs typeface="Arial" pitchFamily="34" charset="-120"/>
                         </a:rPr>
-                        <a:t>₱3.87M</a:t>
+                        <a:t>₱7.20M</a:t>
                       </a:r>
                       <a:endParaRPr lang="en-US" sz="1400" dirty="0">
                         <a:latin typeface="Arial" charset="0"/>
@@ -15567,7 +15567,7 @@
                           <a:ea typeface="Arial" pitchFamily="34" charset="-122"/>
                           <a:cs typeface="Arial" pitchFamily="34" charset="-120"/>
                         </a:rPr>
-                        <a:t>₱1.82M</a:t>
+                        <a:t>₱5.15M</a:t>
                       </a:r>
                       <a:endParaRPr lang="en-US" sz="1400" dirty="0">
                         <a:latin typeface="Arial" charset="0"/>
@@ -15632,7 +15632,7 @@
                           <a:ea typeface="Arial" pitchFamily="34" charset="-122"/>
                           <a:cs typeface="Arial" pitchFamily="34" charset="-120"/>
                         </a:rPr>
-                        <a:t>1.9</a:t>
+                        <a:t>3.5</a:t>
                       </a:r>
                       <a:endParaRPr lang="en-US" sz="1400" dirty="0">
                         <a:latin typeface="Arial" charset="0"/>
@@ -15697,7 +15697,7 @@
                           <a:ea typeface="Arial" pitchFamily="34" charset="-122"/>
                           <a:cs typeface="Arial" pitchFamily="34" charset="-120"/>
                         </a:rPr>
-                        <a:t>22 mo</a:t>
+                        <a:t>15 mo</a:t>
                       </a:r>
                       <a:endParaRPr lang="en-US" sz="1400" dirty="0">
                         <a:latin typeface="Arial" charset="0"/>
@@ -15829,7 +15829,7 @@
                           <a:ea typeface="Arial" pitchFamily="34" charset="-122"/>
                           <a:cs typeface="Arial" pitchFamily="34" charset="-120"/>
                         </a:rPr>
-                        <a:t>₱7.13M</a:t>
+                        <a:t>₱7.76M</a:t>
                       </a:r>
                       <a:endParaRPr lang="en-US" sz="1400" dirty="0">
                         <a:latin typeface="Arial" charset="0"/>
@@ -15894,7 +15894,7 @@
                           <a:ea typeface="Arial" pitchFamily="34" charset="-122"/>
                           <a:cs typeface="Arial" pitchFamily="34" charset="-120"/>
                         </a:rPr>
-                        <a:t>₱5.08M</a:t>
+                        <a:t>₱5.71M</a:t>
                       </a:r>
                       <a:endParaRPr lang="en-US" sz="1400" dirty="0">
                         <a:latin typeface="Arial" charset="0"/>
@@ -15959,7 +15959,7 @@
                           <a:ea typeface="Arial" pitchFamily="34" charset="-122"/>
                           <a:cs typeface="Arial" pitchFamily="34" charset="-120"/>
                         </a:rPr>
-                        <a:t>3.5</a:t>
+                        <a:t>3.8</a:t>
                       </a:r>
                       <a:endParaRPr lang="en-US" sz="1400" dirty="0">
                         <a:latin typeface="Arial" charset="0"/>
@@ -16024,7 +16024,7 @@
                           <a:ea typeface="Arial" pitchFamily="34" charset="-122"/>
                           <a:cs typeface="Arial" pitchFamily="34" charset="-120"/>
                         </a:rPr>
-                        <a:t>15 mo</a:t>
+                        <a:t>14 mo</a:t>
                       </a:r>
                       <a:endParaRPr lang="en-US" sz="1400" dirty="0">
                         <a:latin typeface="Arial" charset="0"/>
@@ -16137,7 +16137,7 @@
                 <a:ea typeface="Arial" pitchFamily="34" charset="-122"/>
                 <a:cs typeface="Arial" pitchFamily="34" charset="-120"/>
               </a:rPr>
-              <a:t>Break-even: 2 hires a year</a:t>
+              <a:t>Break-even: 6 fills a year</a:t>
             </a:r>
             <a:endParaRPr lang="en-US" sz="1700" dirty="0"/>
           </a:p>
@@ -16179,7 +16179,7 @@
                 <a:ea typeface="Arial" pitchFamily="34" charset="-122"/>
                 <a:cs typeface="Arial" pitchFamily="34" charset="-120"/>
               </a:rPr>
-              <a:t>Two internal fills out of roughly 60 internal requisitions a year — a 3.3% hit rate — repay the whole three-year cost.</a:t>
+              <a:t>18 internal fills over three years, against roughly 60 internal requisitions a year — a 10% hit rate.</a:t>
             </a:r>
             <a:endParaRPr lang="en-US" sz="1400" dirty="0"/>
           </a:p>
@@ -16304,7 +16304,7 @@
                 <a:ea typeface="Arial" pitchFamily="34" charset="-122"/>
                 <a:cs typeface="Arial" pitchFamily="34" charset="-120"/>
               </a:rPr>
-              <a:t>agency fees and vacancy days avoided.
+              <a:t>₱0.45M/yr. Hiring cost and vacancy days avoided.
 </a:t>
             </a:r>
             <a:pPr indent="0" marL="0">
@@ -16339,7 +16339,7 @@
                 <a:ea typeface="Arial" pitchFamily="34" charset="-122"/>
                 <a:cs typeface="Arial" pitchFamily="34" charset="-120"/>
               </a:rPr>
-              <a:t>retention among participants, needing no attribution.</a:t>
+              <a:t>₱3.00M/yr. Retention among participants, needing no attribution.</a:t>
             </a:r>
             <a:endParaRPr lang="en-US" sz="1400" dirty="0"/>
           </a:p>
@@ -16404,7 +16404,7 @@
                 <a:ea typeface="Arial" pitchFamily="34" charset="-122"/>
                 <a:cs typeface="Arial" pitchFamily="34" charset="-120"/>
               </a:rPr>
-              <a:t>Basis: Growth-v2-CBA.xlsx. Excludes gig output value, skills built and network effects — real, but not reliably measurable.</a:t>
+              <a:t>Salaries: Payroll average monthly basic, Sep 2026, annualised ×12. Cost per hire: TA 2025 file. Excludes gig output value, skills built and network effects.</a:t>
             </a:r>
             <a:endParaRPr lang="en-US" sz="1400" dirty="0"/>
           </a:p>
@@ -17010,7 +17010,7 @@
                 <a:ea typeface="Arial" pitchFamily="34" charset="-122"/>
                 <a:cs typeface="Arial" pitchFamily="34" charset="-120"/>
               </a:rPr>
-              <a:t>The framing that actually decides it: break-even in internal hires</a:t>
+              <a:t>The framing that actually decides it: break-even in internal fills</a:t>
             </a:r>
             <a:endParaRPr lang="en-US" sz="1900" dirty="0"/>
           </a:p>
@@ -17049,7 +17049,7 @@
                 <a:ea typeface="Arial" pitchFamily="34" charset="-122"/>
                 <a:cs typeface="Arial" pitchFamily="34" charset="-120"/>
               </a:rPr>
-              <a:t>30</a:t>
+              <a:t>94</a:t>
             </a:r>
             <a:endParaRPr lang="en-US" sz="3600" dirty="0"/>
           </a:p>
@@ -17130,7 +17130,7 @@
                 <a:ea typeface="Arial" pitchFamily="34" charset="-122"/>
                 <a:cs typeface="Arial" pitchFamily="34" charset="-120"/>
               </a:rPr>
-              <a:t>internal hires over 3 years just to cover the licence</a:t>
+              <a:t>internal fills over 3 years just to cover the licence</a:t>
             </a:r>
             <a:endParaRPr lang="en-US" sz="1400" dirty="0"/>
           </a:p>
@@ -17169,7 +17169,7 @@
                 <a:ea typeface="Arial" pitchFamily="34" charset="-122"/>
                 <a:cs typeface="Arial" pitchFamily="34" charset="-120"/>
               </a:rPr>
-              <a:t>84</a:t>
+              <a:t>258</a:t>
             </a:r>
             <a:endParaRPr lang="en-US" sz="3600" dirty="0"/>
           </a:p>
@@ -17250,7 +17250,7 @@
                 <a:ea typeface="Arial" pitchFamily="34" charset="-122"/>
                 <a:cs typeface="Arial" pitchFamily="34" charset="-120"/>
               </a:rPr>
-              <a:t>internal hires over 3 years to cover the licence</a:t>
+              <a:t>internal fills over 3 years to cover the licence</a:t>
             </a:r>
             <a:endParaRPr lang="en-US" sz="1400" dirty="0"/>
           </a:p>
@@ -17289,7 +17289,7 @@
                 <a:ea typeface="Arial" pitchFamily="34" charset="-122"/>
                 <a:cs typeface="Arial" pitchFamily="34" charset="-120"/>
               </a:rPr>
-              <a:t>6</a:t>
+              <a:t>18</a:t>
             </a:r>
             <a:endParaRPr lang="en-US" sz="3600" dirty="0"/>
           </a:p>
@@ -17370,7 +17370,7 @@
                 <a:ea typeface="Arial" pitchFamily="34" charset="-122"/>
                 <a:cs typeface="Arial" pitchFamily="34" charset="-120"/>
               </a:rPr>
-              <a:t>internal hires over 3 years — two a year</a:t>
+              <a:t>internal fills over 3 years — six a year</a:t>
             </a:r>
             <a:endParaRPr lang="en-US" sz="1400" dirty="0"/>
           </a:p>
@@ -21742,7 +21742,7 @@
                 <a:ea typeface="Arial" pitchFamily="34" charset="-122"/>
                 <a:cs typeface="Arial" pitchFamily="34" charset="-120"/>
               </a:rPr>
-              <a:t>We fill 16.9% of roles internally against a ~30% benchmark. In 2025 we spent ₱13.4M hiring, ₱6.1M of it to headhunters for Band C alone — while 88% of our people say they can grow here.</a:t>
+              <a:t>We fill 16.9% of roles internally against a ~30% benchmark. In 2025 we spent ₱13.4M hiring, ₱2.8M of it to headhunters for Band C alone — while 88% of our people say they can grow here.</a:t>
             </a:r>
             <a:endParaRPr lang="en-US" sz="1400" dirty="0"/>
           </a:p>
@@ -21958,7 +21958,7 @@
                 <a:ea typeface="Arial" pitchFamily="34" charset="-122"/>
                 <a:cs typeface="Arial" pitchFamily="34" charset="-120"/>
               </a:rPr>
-              <a:t>₱2.05M over three years for 1,113 people — the pilot plus mass operations — on IT's costed build. Benefit ₱7.88M, benefit–cost ratio 3.8, payback in 14 months. Buying Gloat or Fuel50 costs ₱10.7M–₱29.3M.</a:t>
+              <a:t>₱2.05M over three years for 1,113 people — the pilot plus mass operations — on IT's costed build. Benefit ₱8.29M, benefit–cost ratio 4.0, payback in 13 months. Buying Gloat or Fuel50 costs ₱10.7M–₱29.3M.</a:t>
             </a:r>
             <a:endParaRPr lang="en-US" sz="1400" dirty="0"/>
           </a:p>
@@ -22693,7 +22693,7 @@
                 <a:ea typeface="Arial" pitchFamily="34" charset="-122"/>
                 <a:cs typeface="Arial" pitchFamily="34" charset="-120"/>
               </a:rPr>
-              <a:t>Attributed benefit becomes unprovable. BCR falls to 3.0.</a:t>
+              <a:t>Attributed benefit becomes unprovable. BCR falls to 3.5.</a:t>
             </a:r>
             <a:endParaRPr lang="en-US" sz="1400" dirty="0"/>
           </a:p>
@@ -23484,7 +23484,7 @@
             </a:avLst>
           </a:prstGeom>
           <a:solidFill>
-            <a:srgbClr val="6B7280"/>
+            <a:srgbClr val="C00000"/>
           </a:solidFill>
           <a:ln w="12700">
             <a:solidFill>
@@ -23527,7 +23527,7 @@
                 <a:ea typeface="Arial" pitchFamily="34" charset="-122"/>
                 <a:cs typeface="Arial" pitchFamily="34" charset="-120"/>
               </a:rPr>
-              <a:t>MED</a:t>
+              <a:t>GATE</a:t>
             </a:r>
             <a:endParaRPr lang="en-US" sz="1400" dirty="0"/>
           </a:p>
@@ -23569,7 +23569,7 @@
                 <a:ea typeface="Arial" pitchFamily="34" charset="-122"/>
                 <a:cs typeface="Arial" pitchFamily="34" charset="-120"/>
               </a:rPr>
-              <a:t>Benefits fall to the attributed rows — still BCR 3.8, 14-month payback.</a:t>
+              <a:t>Benefits fall to the attributed rows alone — BCR 0.5. The case fails.</a:t>
             </a:r>
             <a:endParaRPr lang="en-US" sz="1400" dirty="0"/>
           </a:p>
@@ -23611,7 +23611,7 @@
                 <a:ea typeface="Arial" pitchFamily="34" charset="-122"/>
                 <a:cs typeface="Arial" pitchFamily="34" charset="-120"/>
               </a:rPr>
-              <a:t>Already modelled. A year-one holdout measures it properly.</a:t>
+              <a:t>Design the year-one holdout before build. Its first read gates wave two.</a:t>
             </a:r>
             <a:endParaRPr lang="en-US" sz="1400" dirty="0"/>
           </a:p>
@@ -23788,7 +23788,7 @@
                 <a:ea typeface="Arial" pitchFamily="34" charset="-122"/>
                 <a:cs typeface="Arial" pitchFamily="34" charset="-120"/>
               </a:rPr>
-              <a:t>Three-year cost rises to ₱1.76M; base BCR falls to 4.0.</a:t>
+              <a:t>Three-year cost rises to ₱3.84M; base BCR falls to 2.2.</a:t>
             </a:r>
             <a:endParaRPr lang="en-US" sz="1400" dirty="0"/>
           </a:p>
@@ -25790,7 +25790,7 @@
                 <a:ea typeface="Arial" pitchFamily="34" charset="-122"/>
                 <a:cs typeface="Arial" pitchFamily="34" charset="-120"/>
               </a:rPr>
-              <a:t>₱2.05M over three years to stop doing that. Benefit–cost ratio 3.8, payback in fourteen months, and a live skills map we have never had.</a:t>
+              <a:t>₱2.05M over three years to stop doing that. Benefit–cost ratio 4.0, payback in thirteen months, and a live skills map we have never had.</a:t>
             </a:r>
             <a:endParaRPr lang="en-US" sz="1900" dirty="0"/>
           </a:p>
@@ -27822,7 +27822,7 @@
                           <a:ea typeface="Arial" pitchFamily="34" charset="-122"/>
                           <a:cs typeface="Arial" pitchFamily="34" charset="-120"/>
                         </a:rPr>
-                        <a:t>3.6</a:t>
+                        <a:t>3.9</a:t>
                       </a:r>
                       <a:endParaRPr lang="en-US" sz="1400" dirty="0">
                         <a:latin typeface="Arial" charset="0"/>
@@ -28344,7 +28344,7 @@
                           <a:ea typeface="Arial" pitchFamily="34" charset="-122"/>
                           <a:cs typeface="Arial" pitchFamily="34" charset="-120"/>
                         </a:rPr>
-                        <a:t>3.8</a:t>
+                        <a:t>4.0</a:t>
                       </a:r>
                       <a:endParaRPr lang="en-US" sz="1400" dirty="0">
                         <a:latin typeface="Arial" charset="0"/>
@@ -28866,7 +28866,7 @@
                           <a:ea typeface="Arial" pitchFamily="34" charset="-122"/>
                           <a:cs typeface="Arial" pitchFamily="34" charset="-120"/>
                         </a:rPr>
-                        <a:t>10.4</a:t>
+                        <a:t>11.1</a:t>
                       </a:r>
                       <a:endParaRPr lang="en-US" sz="1400" dirty="0">
                         <a:latin typeface="Arial" charset="0"/>
@@ -29388,7 +29388,7 @@
                           <a:ea typeface="Arial" pitchFamily="34" charset="-122"/>
                           <a:cs typeface="Arial" pitchFamily="34" charset="-120"/>
                         </a:rPr>
-                        <a:t>9.9</a:t>
+                        <a:t>8.5</a:t>
                       </a:r>
                       <a:endParaRPr lang="en-US" sz="1400" dirty="0">
                         <a:latin typeface="Arial" charset="0"/>
@@ -30072,7 +30072,7 @@
                 <a:ea typeface="Arial" pitchFamily="34" charset="-122"/>
                 <a:cs typeface="Arial" pitchFamily="34" charset="-120"/>
               </a:rPr>
-              <a:t>Cost per hire</a:t>
+              <a:t>TA cost per hire</a:t>
             </a:r>
             <a:endParaRPr lang="en-US" sz="1500" dirty="0"/>
           </a:p>
@@ -30111,7 +30111,7 @@
                 <a:ea typeface="Arial" pitchFamily="34" charset="-122"/>
                 <a:cs typeface="Arial" pitchFamily="34" charset="-120"/>
               </a:rPr>
-              <a:t>₱22,446</a:t>
+              <a:t>₱6,977</a:t>
             </a:r>
             <a:endParaRPr lang="en-US" sz="1600" dirty="0"/>
           </a:p>
@@ -30150,7 +30150,7 @@
                 <a:ea typeface="Arial" pitchFamily="34" charset="-122"/>
                 <a:cs typeface="Arial" pitchFamily="34" charset="-120"/>
               </a:rPr>
-              <a:t>Headhunter fee per hire</a:t>
+              <a:t>37 vacancy days at ₱1,677</a:t>
             </a:r>
             <a:endParaRPr lang="en-US" sz="1500" dirty="0"/>
           </a:p>
@@ -30189,7 +30189,7 @@
                 <a:ea typeface="Arial" pitchFamily="34" charset="-122"/>
                 <a:cs typeface="Arial" pitchFamily="34" charset="-120"/>
               </a:rPr>
-              <a:t>₱9,791</a:t>
+              <a:t>₱62,047</a:t>
             </a:r>
             <a:endParaRPr lang="en-US" sz="1600" dirty="0"/>
           </a:p>
@@ -30255,7 +30255,7 @@
                 <a:ea typeface="Arial" pitchFamily="34" charset="-122"/>
                 <a:cs typeface="Arial" pitchFamily="34" charset="-120"/>
               </a:rPr>
-              <a:t>₱22,446 saved per internal fill</a:t>
+              <a:t>₱69,024 avoided per internal fill</a:t>
             </a:r>
             <a:endParaRPr lang="en-US" sz="1600" dirty="0"/>
           </a:p>
@@ -30553,7 +30553,7 @@
                 <a:ea typeface="Arial" pitchFamily="34" charset="-122"/>
                 <a:cs typeface="Arial" pitchFamily="34" charset="-120"/>
               </a:rPr>
-              <a:t>Cost per hire</a:t>
+              <a:t>TA cost per hire</a:t>
             </a:r>
             <a:endParaRPr lang="en-US" sz="1500" dirty="0"/>
           </a:p>
@@ -30592,7 +30592,7 @@
                 <a:ea typeface="Arial" pitchFamily="34" charset="-122"/>
                 <a:cs typeface="Arial" pitchFamily="34" charset="-120"/>
               </a:rPr>
-              <a:t>₱86,796</a:t>
+              <a:t>₱35,367</a:t>
             </a:r>
             <a:endParaRPr lang="en-US" sz="1600" dirty="0"/>
           </a:p>
@@ -30631,7 +30631,7 @@
                 <a:ea typeface="Arial" pitchFamily="34" charset="-122"/>
                 <a:cs typeface="Arial" pitchFamily="34" charset="-120"/>
               </a:rPr>
-              <a:t>Headhunter fee per hire (68%)</a:t>
+              <a:t>37 vacancy days at ₱4,284</a:t>
             </a:r>
             <a:endParaRPr lang="en-US" sz="1500" dirty="0"/>
           </a:p>
@@ -30670,7 +30670,7 @@
                 <a:ea typeface="Arial" pitchFamily="34" charset="-122"/>
                 <a:cs typeface="Arial" pitchFamily="34" charset="-120"/>
               </a:rPr>
-              <a:t>₱58,823</a:t>
+              <a:t>₱158,510</a:t>
             </a:r>
             <a:endParaRPr lang="en-US" sz="1600" dirty="0"/>
           </a:p>
@@ -30736,7 +30736,7 @@
                 <a:ea typeface="Arial" pitchFamily="34" charset="-122"/>
                 <a:cs typeface="Arial" pitchFamily="34" charset="-120"/>
               </a:rPr>
-              <a:t>₱86,796 saved per internal fill</a:t>
+              <a:t>₱193,877 avoided per internal fill</a:t>
             </a:r>
             <a:endParaRPr lang="en-US" sz="1600" dirty="0"/>
           </a:p>
@@ -30958,7 +30958,7 @@
                 <a:ea typeface="Arial" pitchFamily="34" charset="-122"/>
                 <a:cs typeface="Arial" pitchFamily="34" charset="-120"/>
               </a:rPr>
-              <a:t>₱3.9M</a:t>
+              <a:t>₱9.9M</a:t>
             </a:r>
             <a:endParaRPr lang="en-US" sz="2400" dirty="0"/>
           </a:p>
@@ -31036,7 +31036,7 @@
                 <a:ea typeface="Arial" pitchFamily="34" charset="-122"/>
                 <a:cs typeface="Arial" pitchFamily="34" charset="-120"/>
               </a:rPr>
-              <a:t>2025 volumes, 2024 cost-per-hire</a:t>
+              <a:t>₱1.5M hiring + ₱8.4M vacancy days</a:t>
             </a:r>
             <a:endParaRPr lang="en-US" sz="1400" dirty="0"/>
           </a:p>
@@ -31095,7 +31095,7 @@
                 <a:ea typeface="Arial" pitchFamily="34" charset="-122"/>
                 <a:cs typeface="Arial" pitchFamily="34" charset="-120"/>
               </a:rPr>
-              <a:t>internal moves create backfill, usually cheaper · some external hiring is healthy · 2024 costs applied to 2025 volumes</a:t>
+              <a:t>internal moves create backfill · some external hiring is healthy · vacancy days are lost output, not cash</a:t>
             </a:r>
             <a:endParaRPr lang="en-US" sz="1400" dirty="0"/>
           </a:p>
@@ -31160,7 +31160,7 @@
                 <a:ea typeface="Arial" pitchFamily="34" charset="-122"/>
                 <a:cs typeface="Arial" pitchFamily="34" charset="-120"/>
               </a:rPr>
-              <a:t>The cost–benefit slides use a narrower, attribution-safe subset of this figure — not the ₱3.9M gross.</a:t>
+              <a:t>The cost–benefit slides use a narrower, attribution-safe subset of this figure — not the ₱9.9M gross.</a:t>
             </a:r>
             <a:endParaRPr lang="en-US" sz="1400" dirty="0"/>
           </a:p>
@@ -31491,7 +31491,7 @@
                 <a:ea typeface="Arial" pitchFamily="34" charset="-122"/>
                 <a:cs typeface="Arial" pitchFamily="34" charset="-120"/>
               </a:rPr>
-              <a:t>₱6.1M a year to headhunters</a:t>
+              <a:t>₱2.8M a year to headhunters, Band C</a:t>
             </a:r>
             <a:endParaRPr lang="en-US" sz="1400" dirty="0"/>
           </a:p>
@@ -32971,7 +32971,7 @@
                 <a:ea typeface="Arial" pitchFamily="34" charset="-122"/>
                 <a:cs typeface="Arial" pitchFamily="34" charset="-120"/>
               </a:rPr>
-              <a:t>₱86,796 saved per Band C fill</a:t>
+              <a:t>₱193,877 avoided per Band C fill</a:t>
             </a:r>
             <a:endParaRPr lang="en-US" sz="1400" dirty="0"/>
           </a:p>
@@ -32995,7 +32995,7 @@
                 <a:ea typeface="Arial" pitchFamily="34" charset="-122"/>
                 <a:cs typeface="Arial" pitchFamily="34" charset="-120"/>
               </a:rPr>
-              <a:t>₱22,446 saved per Band B fill</a:t>
+              <a:t>₱69,024 per Band B fill</a:t>
             </a:r>
             <a:endParaRPr lang="en-US" sz="1400" dirty="0"/>
           </a:p>
@@ -33019,7 +33019,7 @@
                 <a:ea typeface="Arial" pitchFamily="34" charset="-122"/>
                 <a:cs typeface="Arial" pitchFamily="34" charset="-120"/>
               </a:rPr>
-              <a:t>37 vacancy days avoided per fill</a:t>
+              <a:t>₱113,522 blended per attributed fill</a:t>
             </a:r>
             <a:endParaRPr lang="en-US" sz="1400" dirty="0"/>
           </a:p>
@@ -37342,7 +37342,7 @@
                 <a:spcPts val="1800"/>
               </a:lnSpc>
               <a:spcAft>
-                <a:spcPts val="500"/>
+                <a:spcPts val="400"/>
               </a:spcAft>
               <a:buSzPct val="100000"/>
               <a:buChar char="•"/>
@@ -37356,7 +37356,7 @@
                 <a:ea typeface="Arial" pitchFamily="34" charset="-122"/>
                 <a:cs typeface="Arial" pitchFamily="34" charset="-120"/>
               </a:rPr>
-              <a:t>Internal job posting data, 2024–2026 — 1,008 vacancies, 463 internal applicants, 170 accepted: a 16.9% internal fill rate.</a:t>
+              <a:t>Internal job posting data, 2024–2026 — 1,008 vacancies, 463 internal applicants, 170 accepted: 16.9% internal fill.</a:t>
             </a:r>
             <a:endParaRPr lang="en-US" sz="1400" dirty="0"/>
           </a:p>
@@ -37366,7 +37366,7 @@
                 <a:spcPts val="1800"/>
               </a:lnSpc>
               <a:spcAft>
-                <a:spcPts val="500"/>
+                <a:spcPts val="400"/>
               </a:spcAft>
               <a:buSzPct val="100000"/>
               <a:buChar char="•"/>
@@ -37380,7 +37380,7 @@
                 <a:ea typeface="Arial" pitchFamily="34" charset="-122"/>
                 <a:cs typeface="Arial" pitchFamily="34" charset="-120"/>
               </a:rPr>
-              <a:t>2025 hiring volumes: 324 roles, of which 186 Band B and 103 Band C.</a:t>
+              <a:t>2025 hiring: 324 roles, of which 186 Band B and 103 Band C. TA cost per hire ₱6,977 Band B, ₱35,367 Band C; headhunter 77.7% of Band C. Supersedes the 2024 figures.</a:t>
             </a:r>
             <a:endParaRPr lang="en-US" sz="1400" dirty="0"/>
           </a:p>
@@ -37390,7 +37390,7 @@
                 <a:spcPts val="1800"/>
               </a:lnSpc>
               <a:spcAft>
-                <a:spcPts val="500"/>
+                <a:spcPts val="400"/>
               </a:spcAft>
               <a:buSzPct val="100000"/>
               <a:buChar char="•"/>
@@ -37404,7 +37404,7 @@
                 <a:ea typeface="Arial" pitchFamily="34" charset="-122"/>
                 <a:cs typeface="Arial" pitchFamily="34" charset="-120"/>
               </a:rPr>
-              <a:t>2024 cost-per-hire: ₱22,446 Band B, ₱86,796 Band C; headhunter fee 68% of Band C cost.</a:t>
+              <a:t>Payroll average basic/month, Sep 2026: B ₱36,334 · C ₱92,821 · non-mass ₱85,803 · mass ops ₱15,144.</a:t>
             </a:r>
             <a:endParaRPr lang="en-US" sz="1400" dirty="0"/>
           </a:p>
@@ -37414,7 +37414,7 @@
                 <a:spcPts val="1800"/>
               </a:lnSpc>
               <a:spcAft>
-                <a:spcPts val="500"/>
+                <a:spcPts val="400"/>
               </a:spcAft>
               <a:buSzPct val="100000"/>
               <a:buChar char="•"/>
@@ -37428,7 +37428,7 @@
                 <a:ea typeface="Arial" pitchFamily="34" charset="-122"/>
                 <a:cs typeface="Arial" pitchFamily="34" charset="-120"/>
               </a:rPr>
-              <a:t>Exit survey — "Career &amp; Better Opportunity", 22% of exits.</a:t>
+              <a:t>Exit survey — "Career &amp; Better Opportunity", 22% of exits. eNPS on growth — 88% believe they can grow here. 2026 IDP filings 1,249; career movement preferences 1,109.</a:t>
             </a:r>
             <a:endParaRPr lang="en-US" sz="1400" dirty="0"/>
           </a:p>
@@ -37438,7 +37438,7 @@
                 <a:spcPts val="1800"/>
               </a:lnSpc>
               <a:spcAft>
-                <a:spcPts val="500"/>
+                <a:spcPts val="400"/>
               </a:spcAft>
               <a:buSzPct val="100000"/>
               <a:buChar char="•"/>
@@ -37452,7 +37452,7 @@
                 <a:ea typeface="Arial" pitchFamily="34" charset="-122"/>
                 <a:cs typeface="Arial" pitchFamily="34" charset="-120"/>
               </a:rPr>
-              <a:t>eNPS on growth opportunity — 88% believe they can grow here.</a:t>
+              <a:t>HRIS headcount — 637 pilot, 1,113 with mass ops, 1,991 non-mass, 20,587 full organisation.</a:t>
             </a:r>
             <a:endParaRPr lang="en-US" sz="1400" dirty="0"/>
           </a:p>
@@ -37462,55 +37462,7 @@
                 <a:spcPts val="1800"/>
               </a:lnSpc>
               <a:spcAft>
-                <a:spcPts val="500"/>
-              </a:spcAft>
-              <a:buSzPct val="100000"/>
-              <a:buChar char="•"/>
-            </a:pPr>
-            <a:r>
-              <a:rPr lang="en-US" sz="1400" dirty="0">
-                <a:solidFill>
-                  <a:srgbClr val="374151"/>
-                </a:solidFill>
-                <a:latin typeface="Arial" pitchFamily="34" charset="0"/>
-                <a:ea typeface="Arial" pitchFamily="34" charset="-122"/>
-                <a:cs typeface="Arial" pitchFamily="34" charset="-120"/>
-              </a:rPr>
-              <a:t>2026 IDP filings (1,249) and career movement preferences (1,109).</a:t>
-            </a:r>
-            <a:endParaRPr lang="en-US" sz="1400" dirty="0"/>
-          </a:p>
-          <a:p>
-            <a:pPr marL="342900" indent="-342900">
-              <a:lnSpc>
-                <a:spcPts val="1800"/>
-              </a:lnSpc>
-              <a:spcAft>
-                <a:spcPts val="500"/>
-              </a:spcAft>
-              <a:buSzPct val="100000"/>
-              <a:buChar char="•"/>
-            </a:pPr>
-            <a:r>
-              <a:rPr lang="en-US" sz="1400" dirty="0">
-                <a:solidFill>
-                  <a:srgbClr val="374151"/>
-                </a:solidFill>
-                <a:latin typeface="Arial" pitchFamily="34" charset="0"/>
-                <a:ea typeface="Arial" pitchFamily="34" charset="-122"/>
-                <a:cs typeface="Arial" pitchFamily="34" charset="-120"/>
-              </a:rPr>
-              <a:t>HRIS headcount — 637 pilot, 1,113 with mass operations, 1,991 non-mass, 20,587 full organisation.</a:t>
-            </a:r>
-            <a:endParaRPr lang="en-US" sz="1400" dirty="0"/>
-          </a:p>
-          <a:p>
-            <a:pPr marL="342900" indent="-342900">
-              <a:lnSpc>
-                <a:spcPts val="1800"/>
-              </a:lnSpc>
-              <a:spcAft>
-                <a:spcPts val="500"/>
+                <a:spcPts val="400"/>
               </a:spcAft>
               <a:buSzPct val="100000"/>
               <a:buChar char="•"/>
@@ -37629,7 +37581,7 @@
                 <a:spcPts val="1800"/>
               </a:lnSpc>
               <a:spcAft>
-                <a:spcPts val="500"/>
+                <a:spcPts val="400"/>
               </a:spcAft>
               <a:buSzPct val="100000"/>
               <a:buChar char="•"/>
@@ -37653,7 +37605,7 @@
                 <a:spcPts val="1800"/>
               </a:lnSpc>
               <a:spcAft>
-                <a:spcPts val="500"/>
+                <a:spcPts val="400"/>
               </a:spcAft>
               <a:buSzPct val="100000"/>
               <a:buChar char="•"/>
@@ -37677,7 +37629,7 @@
                 <a:spcPts val="1800"/>
               </a:lnSpc>
               <a:spcAft>
-                <a:spcPts val="500"/>
+                <a:spcPts val="400"/>
               </a:spcAft>
               <a:buSzPct val="100000"/>
               <a:buChar char="•"/>
@@ -37691,7 +37643,7 @@
                 <a:ea typeface="Arial" pitchFamily="34" charset="-122"/>
                 <a:cs typeface="Arial" pitchFamily="34" charset="-120"/>
               </a:rPr>
-              <a:t>Avoided agency fee per attributed fill ₱350,000; 37 vacancy days saved.</a:t>
+              <a:t>Avoided per attributed fill ₱113,522 — ₱17,095 TA cost on the 2025 Band B/C mix plus 37 vacancy days (₱96,427). Replaces the unsourced ₱350,000 agency fee. Salaries annualised ×12, basic only.</a:t>
             </a:r>
             <a:endParaRPr lang="en-US" sz="1400" dirty="0"/>
           </a:p>
@@ -37701,7 +37653,7 @@
                 <a:spcPts val="1800"/>
               </a:lnSpc>
               <a:spcAft>
-                <a:spcPts val="500"/>
+                <a:spcPts val="400"/>
               </a:spcAft>
               <a:buSzPct val="100000"/>
               <a:buChar char="•"/>
@@ -37715,7 +37667,7 @@
                 <a:ea typeface="Arial" pitchFamily="34" charset="-122"/>
                 <a:cs typeface="Arial" pitchFamily="34" charset="-120"/>
               </a:rPr>
-              <a:t>Retention lift modelled at 3 points, discounted from the 13-point gap in v1 data — that gap is almost certainly selection bias.</a:t>
+              <a:t>Retention lift 3 points, discounted from the 13-point gap in v1 data — almost certainly selection bias. 120 participants a year.</a:t>
             </a:r>
             <a:endParaRPr lang="en-US" sz="1400" dirty="0"/>
           </a:p>
@@ -37725,7 +37677,7 @@
                 <a:spcPts val="1800"/>
               </a:lnSpc>
               <a:spcAft>
-                <a:spcPts val="500"/>
+                <a:spcPts val="400"/>
               </a:spcAft>
               <a:buSzPct val="100000"/>
               <a:buChar char="•"/>
@@ -37739,7 +37691,7 @@
                 <a:ea typeface="Arial" pitchFamily="34" charset="-122"/>
                 <a:cs typeface="Arial" pitchFamily="34" charset="-120"/>
               </a:rPr>
-              <a:t>120 gig, immersion and service-offer participants a year.</a:t>
+              <a:t>Vendor comparison is an RFP planning band, not a quote — no vendor publishes per-seat pricing.</a:t>
             </a:r>
             <a:endParaRPr lang="en-US" sz="1400" dirty="0"/>
           </a:p>
@@ -37749,7 +37701,7 @@
                 <a:spcPts val="1800"/>
               </a:lnSpc>
               <a:spcAft>
-                <a:spcPts val="500"/>
+                <a:spcPts val="400"/>
               </a:spcAft>
               <a:buSzPct val="100000"/>
               <a:buChar char="•"/>
@@ -37763,55 +37715,7 @@
                 <a:ea typeface="Arial" pitchFamily="34" charset="-122"/>
                 <a:cs typeface="Arial" pitchFamily="34" charset="-120"/>
               </a:rPr>
-              <a:t>Vendor comparison is an RFP planning band, not a quote — no vendor publishes per-seat pricing.</a:t>
-            </a:r>
-            <a:endParaRPr lang="en-US" sz="1400" dirty="0"/>
-          </a:p>
-          <a:p>
-            <a:pPr marL="342900" indent="-342900">
-              <a:lnSpc>
-                <a:spcPts val="1800"/>
-              </a:lnSpc>
-              <a:spcAft>
-                <a:spcPts val="500"/>
-              </a:spcAft>
-              <a:buSzPct val="100000"/>
-              <a:buChar char="•"/>
-            </a:pPr>
-            <a:r>
-              <a:rPr lang="en-US" sz="1400" dirty="0">
-                <a:solidFill>
-                  <a:srgbClr val="374151"/>
-                </a:solidFill>
-                <a:latin typeface="Arial" pitchFamily="34" charset="0"/>
-                <a:ea typeface="Arial" pitchFamily="34" charset="-122"/>
-                <a:cs typeface="Arial" pitchFamily="34" charset="-120"/>
-              </a:rPr>
-              <a:t>Excluded from benefits: gig output, skills built, network effects.</a:t>
-            </a:r>
-            <a:endParaRPr lang="en-US" sz="1400" dirty="0"/>
-          </a:p>
-          <a:p>
-            <a:pPr marL="342900" indent="-342900">
-              <a:lnSpc>
-                <a:spcPts val="1800"/>
-              </a:lnSpc>
-              <a:spcAft>
-                <a:spcPts val="500"/>
-              </a:spcAft>
-              <a:buSzPct val="100000"/>
-              <a:buChar char="•"/>
-            </a:pPr>
-            <a:r>
-              <a:rPr lang="en-US" sz="1400" dirty="0">
-                <a:solidFill>
-                  <a:srgbClr val="374151"/>
-                </a:solidFill>
-                <a:latin typeface="Arial" pitchFamily="34" charset="0"/>
-                <a:ea typeface="Arial" pitchFamily="34" charset="-122"/>
-                <a:cs typeface="Arial" pitchFamily="34" charset="-120"/>
-              </a:rPr>
-              <a:t>Excluded from costs: 0.2–0.3 FTE ownership from year two.</a:t>
+              <a:t>Excluded from benefits: gig output, skills built, network effects. From costs: 0.2–0.3 FTE ownership from year 2.</a:t>
             </a:r>
             <a:endParaRPr lang="en-US" sz="1400" dirty="0"/>
           </a:p>
@@ -42026,7 +41930,7 @@
                 <a:ea typeface="Arial" pitchFamily="34" charset="-122"/>
                 <a:cs typeface="Arial" pitchFamily="34" charset="-120"/>
               </a:rPr>
-              <a:t>₱6.1M</a:t>
+              <a:t>₱2.8M</a:t>
             </a:r>
             <a:endParaRPr lang="en-US" sz="3400" dirty="0"/>
           </a:p>
@@ -42068,7 +41972,7 @@
                 <a:ea typeface="Arial" pitchFamily="34" charset="-122"/>
                 <a:cs typeface="Arial" pitchFamily="34" charset="-120"/>
               </a:rPr>
-              <a:t>a year to headhunters, Band C alone</a:t>
+              <a:t>a year to headhunters, Band C</a:t>
             </a:r>
             <a:endParaRPr lang="en-US" sz="1600" dirty="0"/>
           </a:p>
@@ -42110,7 +42014,7 @@
                 <a:ea typeface="Arial" pitchFamily="34" charset="-122"/>
                 <a:cs typeface="Arial" pitchFamily="34" charset="-120"/>
               </a:rPr>
-              <a:t>₱58,823 per hire — 68% of the cost of filling a Band C role. Every internal fill returns that fee.</a:t>
+              <a:t>₱27,480 a hire — 78% of the ₱35,367 cost of a Band C fill. Every internal fill returns it.</a:t>
             </a:r>
             <a:endParaRPr lang="en-US" sz="1400" dirty="0"/>
           </a:p>
@@ -42726,7 +42630,7 @@
                 <a:ea typeface="Arial" pitchFamily="34" charset="-122"/>
                 <a:cs typeface="Arial" pitchFamily="34" charset="-120"/>
               </a:rPr>
-              <a:t>₱6.1M a year in avoidable fees, plus the people we will replace at 50–200% of salary — for want of a mechanism that costs ₱550 per employee a year.</a:t>
+              <a:t>₱2.8M a year in avoidable Band C fees, plus ₱158,510 of lost output per external Band C fill, for want of a mechanism costing ₱614 a head a year.</a:t>
             </a:r>
             <a:endParaRPr lang="en-US" sz="1600" dirty="0"/>
           </a:p>
@@ -42791,7 +42695,7 @@
                 <a:ea typeface="Arial" pitchFamily="34" charset="-122"/>
                 <a:cs typeface="Arial" pitchFamily="34" charset="-120"/>
               </a:rPr>
-              <a:t>Sources: 2024 cost-per-hire · 2025 hiring volumes · HCPH exit survey · SHRM replacement-cost range.</a:t>
+              <a:t>Sources: TA cost-per-hire 2025 · 2025 hiring volumes · Payroll average basic Sep 2026 · HCPH exit survey · SHRM replacement-cost range.</a:t>
             </a:r>
             <a:endParaRPr lang="en-US" sz="1400" dirty="0"/>
           </a:p>
